--- a/deliverables/business/financial-deck.pptx
+++ b/deliverables/business/financial-deck.pptx
@@ -221,7 +221,7 @@
               <c:strCache>
                 <c:ptCount val="1"/>
                 <c:pt idx="0">
-                  <c:v>Costs</c:v>
+                  <c:v>Operating cost</c:v>
                 </c:pt>
               </c:strCache>
             </c:strRef>
@@ -283,13 +283,13 @@
                 <c:formatCode>General</c:formatCode>
                 <c:ptCount val="3"/>
                 <c:pt idx="0">
-                  <c:v>31440</c:v>
+                  <c:v>6240</c:v>
                 </c:pt>
                 <c:pt idx="1">
-                  <c:v>41280</c:v>
+                  <c:v>10480</c:v>
                 </c:pt>
                 <c:pt idx="2">
-                  <c:v>55720</c:v>
+                  <c:v>16720</c:v>
                 </c:pt>
               </c:numCache>
             </c:numRef>
@@ -304,14 +304,14 @@
               <c:strCache>
                 <c:ptCount val="1"/>
                 <c:pt idx="0">
-                  <c:v>Net</c:v>
+                  <c:v>Founder income (surplus)</c:v>
                 </c:pt>
               </c:strCache>
             </c:strRef>
           </c:tx>
           <c:spPr>
             <a:solidFill>
-              <a:srgbClr val="B85042"/>
+              <a:srgbClr val="5A7D5A"/>
             </a:solidFill>
             <a:effectLst/>
           </c:spPr>
@@ -366,13 +366,13 @@
                 <c:formatCode>General</c:formatCode>
                 <c:ptCount val="3"/>
                 <c:pt idx="0">
-                  <c:v>-19119</c:v>
+                  <c:v>6081</c:v>
                 </c:pt>
                 <c:pt idx="1">
-                  <c:v>-13209</c:v>
+                  <c:v>17591</c:v>
                 </c:pt>
                 <c:pt idx="2">
-                  <c:v>-6733</c:v>
+                  <c:v>32267</c:v>
                 </c:pt>
               </c:numCache>
             </c:numRef>
@@ -923,7 +923,9 @@
     <c:autoTitleDeleted val="1"/>
     <c:plotArea>
       <c:layout/>
-      <c:lineChart>
+      <c:barChart>
+        <c:barDir val="col"/>
+        <c:grouping val="clustered"/>
         <c:varyColors val="0"/>
         <c:ser>
           <c:idx val="0"/>
@@ -934,22 +936,15 @@
               <c:strCache>
                 <c:ptCount val="1"/>
                 <c:pt idx="0">
-                  <c:v>Cumulative net</c:v>
+                  <c:v>Founder income</c:v>
                 </c:pt>
               </c:strCache>
             </c:strRef>
           </c:tx>
           <c:spPr>
             <a:solidFill>
-              <a:srgbClr val="B85042"/>
+              <a:srgbClr val="5A7D5A"/>
             </a:solidFill>
-            <a:ln w="38100" cap="flat">
-              <a:solidFill>
-                <a:srgbClr val="B85042"/>
-              </a:solidFill>
-              <a:prstDash val="solid"/>
-              <a:round/>
-            </a:ln>
             <a:effectLst/>
           </c:spPr>
           <c:invertIfNegative val="0"/>
@@ -977,43 +972,20 @@
             <c:showBubbleSize val="0"/>
             <c:showLeaderLines val="0"/>
           </c:dLbls>
-          <c:marker>
-            <c:symbol val="circle"/>
-            <c:size val="6"/>
-            <c:spPr>
-              <a:solidFill>
-                <a:srgbClr val="B85042"/>
-              </a:solidFill>
-              <a:ln w="9525" cap="flat">
-                <a:solidFill>
-                  <a:srgbClr val="B85042"/>
-                </a:solidFill>
-                <a:prstDash val="solid"/>
-                <a:round/>
-              </a:ln>
-              <a:effectLst/>
-            </c:spPr>
-          </c:marker>
           <c:cat>
             <c:multiLvlStrRef>
-              <c:f>Sheet1!$A$2:$A$6</c:f>
+              <c:f>Sheet1!$A$2:$A$4</c:f>
               <c:multiLvlStrCache>
-                <c:ptCount val="5"/>
+                <c:ptCount val="3"/>
                 <c:lvl>
                   <c:pt idx="0">
-                    <c:v>Y1</c:v>
+                    <c:v>Year 1</c:v>
                   </c:pt>
                   <c:pt idx="1">
-                    <c:v>Y2</c:v>
+                    <c:v>Year 2</c:v>
                   </c:pt>
                   <c:pt idx="2">
-                    <c:v>Y3</c:v>
-                  </c:pt>
-                  <c:pt idx="3">
-                    <c:v>Y4</c:v>
-                  </c:pt>
-                  <c:pt idx="4">
-                    <c:v>Y5</c:v>
+                    <c:v>Year 3</c:v>
                   </c:pt>
                 </c:lvl>
               </c:multiLvlStrCache>
@@ -1021,29 +993,22 @@
           </c:cat>
           <c:val>
             <c:numRef>
-              <c:f>Sheet1!$B$2:$B$6</c:f>
+              <c:f>Sheet1!$B$2:$B$4</c:f>
               <c:numCache>
                 <c:formatCode>General</c:formatCode>
-                <c:ptCount val="5"/>
+                <c:ptCount val="3"/>
                 <c:pt idx="0">
-                  <c:v>-13199</c:v>
+                  <c:v>6081</c:v>
                 </c:pt>
                 <c:pt idx="1">
-                  <c:v>-19708</c:v>
+                  <c:v>17591</c:v>
                 </c:pt>
                 <c:pt idx="2">
-                  <c:v>3496</c:v>
-                </c:pt>
-                <c:pt idx="3">
-                  <c:v>47934</c:v>
-                </c:pt>
-                <c:pt idx="4">
-                  <c:v>103345</c:v>
+                  <c:v>32267</c:v>
                 </c:pt>
               </c:numCache>
             </c:numRef>
           </c:val>
-          <c:smooth val="1"/>
         </c:ser>
         <c:dLbls>
           <c:numFmt formatCode="#,##0" sourceLinked="0"/>
@@ -1069,11 +1034,12 @@
           <c:showBubbleSize val="0"/>
           <c:showLeaderLines val="0"/>
         </c:dLbls>
-        <c:marker val="1"/>
+        <c:gapWidth val="150"/>
+        <c:overlap val="0"/>
         <c:axId val="2094734554"/>
         <c:axId val="2094734552"/>
         <c:axId val="2094734556"/>
-      </c:lineChart>
+      </c:barChart>
       <c:catAx>
         <c:axId val="2094734554"/>
         <c:scaling>
@@ -2897,7 +2863,7 @@
         </p:nvSpPr>
         <p:spPr>
           <a:xfrm>
-            <a:off x="640080" y="1325880"/>
+            <a:off x="640080" y="1280160"/>
             <a:ext cx="7863840" cy="914400"/>
           </a:xfrm>
           <a:prstGeom prst="rect">
@@ -2936,7 +2902,7 @@
         </p:nvSpPr>
         <p:spPr>
           <a:xfrm>
-            <a:off x="640080" y="2423160"/>
+            <a:off x="640080" y="2377440"/>
             <a:ext cx="7863840" cy="914400"/>
           </a:xfrm>
           <a:prstGeom prst="rect">
@@ -2961,7 +2927,7 @@
                 <a:ea typeface="Georgia" pitchFamily="34" charset="-122"/>
                 <a:cs typeface="Georgia" pitchFamily="34" charset="-120"/>
               </a:rPr>
-              <a:t>A financial overview for an early-stage startup prying open a legacy,</a:t>
+              <a:t>A financial overview for a bootstrapped business prying open a legacy,</a:t>
             </a:r>
             <a:endParaRPr lang="en-US" sz="1900" dirty="0"/>
           </a:p>
@@ -2992,8 +2958,8 @@
         </p:nvSpPr>
         <p:spPr>
           <a:xfrm>
-            <a:off x="640080" y="3703320"/>
-            <a:ext cx="7863840" cy="365760"/>
+            <a:off x="640080" y="3657600"/>
+            <a:ext cx="7863840" cy="457200"/>
           </a:xfrm>
           <a:prstGeom prst="rect">
             <a:avLst/>
@@ -3017,7 +2983,7 @@
                 <a:ea typeface="Calibri" pitchFamily="34" charset="-122"/>
                 <a:cs typeface="Calibri" pitchFamily="34" charset="-120"/>
               </a:rPr>
-              <a:t>Conservative base case + a clearly-labeled path to viability.  </a:t>
+              <a:t>Owner-operated. No funding round. No founder salary. Cash-financed from day one.  </a:t>
             </a:r>
             <a:pPr indent="0" marL="0">
               <a:buNone/>
@@ -3031,7 +2997,7 @@
                 <a:ea typeface="Calibri" pitchFamily="34" charset="-122"/>
                 <a:cs typeface="Calibri" pitchFamily="34" charset="-120"/>
               </a:rPr>
-              <a:t>No hockey sticks.</a:t>
+              <a:t>This is Zimbabwe — conservative by necessity, not by choice.</a:t>
             </a:r>
             <a:endParaRPr lang="en-US" sz="1300" dirty="0"/>
           </a:p>
@@ -3206,7 +3172,7 @@
               <a:buNone/>
             </a:pPr>
             <a:r>
-              <a:rPr lang="en-US" sz="3300" b="1" dirty="0">
+              <a:rPr lang="en-US" sz="3100" b="1" dirty="0">
                 <a:solidFill>
                   <a:srgbClr val="F5E6D3"/>
                 </a:solidFill>
@@ -3214,9 +3180,9 @@
                 <a:ea typeface="Georgia" pitchFamily="34" charset="-122"/>
                 <a:cs typeface="Georgia" pitchFamily="34" charset="-120"/>
               </a:rPr>
-              <a:t>Three things from Paynow turn the floor into the path.</a:t>
-            </a:r>
-            <a:endParaRPr lang="en-US" sz="3300" dirty="0"/>
+              <a:t>We're not asking for money. We're asking for doors and rails.</a:t>
+            </a:r>
+            <a:endParaRPr lang="en-US" sz="3100" dirty="0"/>
           </a:p>
         </p:txBody>
       </p:sp>
@@ -3306,7 +3272,7 @@
                 <a:ea typeface="Calibri" pitchFamily="34" charset="-122"/>
                 <a:cs typeface="Calibri" pitchFamily="34" charset="-120"/>
               </a:rPr>
-              <a:t>Paab sandbox + docs, and BillPay-PAY vendor-portal registration. These widen the buyer base and lift adoption above the floor.</a:t>
+              <a:t>Paab sandbox + docs (the only red on the board) and the BillPay PAY round-trip (vendor-portal registration; AUTH is already live). These widen the buyer base and lift adoption.</a:t>
             </a:r>
             <a:endParaRPr lang="en-US" sz="1600" dirty="0"/>
           </a:p>
@@ -3398,7 +3364,7 @@
                 <a:ea typeface="Calibri" pitchFamily="34" charset="-122"/>
                 <a:cs typeface="Calibri" pitchFamily="34" charset="-120"/>
               </a:rPr>
-              <a:t>Name ZimLivestock as Paynow's vertical solution for livestock. Co-marketing, a case study, a warm intro to one Harare auction house.</a:t>
+              <a:t>Name ZimLivestock as Paynow's livestock vertical solution; Paynow BD refers livestock-industry prospects. We grow your GMV; you grow our pipeline.</a:t>
             </a:r>
             <a:endParaRPr lang="en-US" sz="1600" dirty="0"/>
           </a:p>
@@ -3476,7 +3442,7 @@
                 <a:ea typeface="Calibri" pitchFamily="34" charset="-122"/>
                 <a:cs typeface="Calibri" pitchFamily="34" charset="-120"/>
               </a:rPr>
-              <a:t>Back a paid pilot   </a:t>
+              <a:t>Open one door   </a:t>
             </a:r>
             <a:pPr indent="0" marL="0">
               <a:buNone/>
@@ -3490,7 +3456,7 @@
                 <a:ea typeface="Calibri" pitchFamily="34" charset="-122"/>
                 <a:cs typeface="Calibri" pitchFamily="34" charset="-120"/>
               </a:rPr>
-              <a:t>One 90-day pilot, US$5k + US$1,000/mo. It proves the per-house economics and produces the reference number the whole model rests on.</a:t>
+              <a:t>A warm introduction to one Harare-area auction house. The pilot is paid by the customer, not by Paynow — we just need the room.</a:t>
             </a:r>
             <a:endParaRPr lang="en-US" sz="1600" dirty="0"/>
           </a:p>
@@ -3626,7 +3592,7 @@
                 <a:ea typeface="Georgia" pitchFamily="34" charset="-122"/>
                 <a:cs typeface="Georgia" pitchFamily="34" charset="-120"/>
               </a:rPr>
-              <a:t>The per-house economics work even at 15% adoption.  </a:t>
+              <a:t>This is a bootstrap, not a startup with a runway.  </a:t>
             </a:r>
             <a:pPr indent="0" marL="0">
               <a:lnSpc>
@@ -3646,7 +3612,7 @@
                 <a:ea typeface="Georgia" pitchFamily="34" charset="-122"/>
                 <a:cs typeface="Georgia" pitchFamily="34" charset="-120"/>
               </a:rPr>
-              <a:t>The honest base case is investment-stage — </a:t>
+              <a:t>There is no capital to raise in this market, so the business is built to be cash-positive from the first house — </a:t>
             </a:r>
             <a:pPr indent="0" marL="0">
               <a:lnSpc>
@@ -3666,7 +3632,7 @@
                 <a:ea typeface="Georgia" pitchFamily="34" charset="-122"/>
                 <a:cs typeface="Georgia" pitchFamily="34" charset="-120"/>
               </a:rPr>
-              <a:t>three houses, three years, −US$39,061 net, </a:t>
+              <a:t>founder income of US$6,081 → US$32,267 across three years, on US$0 of outside money, </a:t>
             </a:r>
             <a:pPr indent="0" marL="0">
               <a:lnSpc>
@@ -3686,7 +3652,7 @@
                 <a:ea typeface="Georgia" pitchFamily="34" charset="-122"/>
                 <a:cs typeface="Georgia" pitchFamily="34" charset="-120"/>
               </a:rPr>
-              <a:t>because breaking a manual, cash-based market is slow and we refuse to pretend otherwise.  </a:t>
+              <a:t>and never more than US$2,250 out of pocket.  The per-house economics work; growth is paid for from surplus; the ceiling is people, not cash.  </a:t>
             </a:r>
             <a:pPr indent="0" marL="0">
               <a:lnSpc>
@@ -3698,94 +3664,54 @@
               <a:buNone/>
             </a:pPr>
             <a:r>
-              <a:rPr lang="en-US" sz="1700" dirty="0">
-                <a:solidFill>
-                  <a:srgbClr val="F5E6D3"/>
+              <a:rPr lang="en-US" sz="1700" b="1" dirty="0">
+                <a:solidFill>
+                  <a:srgbClr val="D4A843"/>
                 </a:solidFill>
                 <a:latin typeface="Georgia" pitchFamily="34" charset="0"/>
                 <a:ea typeface="Georgia" pitchFamily="34" charset="-122"/>
                 <a:cs typeface="Georgia" pitchFamily="34" charset="-120"/>
               </a:rPr>
-              <a:t>The constraint is scale, not adoption.  </a:t>
-            </a:r>
-            <a:pPr indent="0" marL="0">
-              <a:lnSpc>
-                <a:spcPct val="115000"/>
-              </a:lnSpc>
-              <a:spcAft>
-                <a:spcPts val="400"/>
-              </a:spcAft>
-              <a:buNone/>
-            </a:pPr>
-            <a:r>
-              <a:rPr lang="en-US" sz="1700" dirty="0">
-                <a:solidFill>
-                  <a:srgbClr val="F5E6D3"/>
+              <a:t>And along the way it routes over US$800k onto Paynow's rails.</a:t>
+            </a:r>
+            <a:endParaRPr lang="en-US" sz="1700" dirty="0"/>
+          </a:p>
+        </p:txBody>
+      </p:sp>
+      <p:sp>
+        <p:nvSpPr>
+          <p:cNvPr id="5" name="Text 3"/>
+          <p:cNvSpPr/>
+          <p:nvPr/>
+        </p:nvSpPr>
+        <p:spPr>
+          <a:xfrm>
+            <a:off x="640080" y="3703320"/>
+            <a:ext cx="7863840" cy="457200"/>
+          </a:xfrm>
+          <a:prstGeom prst="rect">
+            <a:avLst/>
+          </a:prstGeom>
+          <a:noFill/>
+          <a:ln/>
+        </p:spPr>
+        <p:txBody>
+          <a:bodyPr wrap="square" lIns="0" tIns="0" rIns="0" bIns="0" rtlCol="0" anchor="ctr"/>
+          <a:lstStyle/>
+          <a:p>
+            <a:pPr indent="0" marL="0">
+              <a:buNone/>
+            </a:pPr>
+            <a:r>
+              <a:rPr lang="en-US" sz="2000" b="1" i="1" dirty="0">
+                <a:solidFill>
+                  <a:srgbClr val="D4A843"/>
                 </a:solidFill>
                 <a:latin typeface="Georgia" pitchFamily="34" charset="0"/>
                 <a:ea typeface="Georgia" pitchFamily="34" charset="-122"/>
                 <a:cs typeface="Georgia" pitchFamily="34" charset="-120"/>
               </a:rPr>
-              <a:t>With Paynow unblocking the rails and backing one pilot, the same product crosses break-even in year 3 — </a:t>
-            </a:r>
-            <a:pPr indent="0" marL="0">
-              <a:lnSpc>
-                <a:spcPct val="115000"/>
-              </a:lnSpc>
-              <a:spcAft>
-                <a:spcPts val="400"/>
-              </a:spcAft>
-              <a:buNone/>
-            </a:pPr>
-            <a:r>
-              <a:rPr lang="en-US" sz="1700" b="1" dirty="0">
-                <a:solidFill>
-                  <a:srgbClr val="D4A843"/>
-                </a:solidFill>
-                <a:latin typeface="Georgia" pitchFamily="34" charset="0"/>
-                <a:ea typeface="Georgia" pitchFamily="34" charset="-122"/>
-                <a:cs typeface="Georgia" pitchFamily="34" charset="-120"/>
-              </a:rPr>
-              <a:t>and routes over US$800k onto Paynow rails along the way.</a:t>
-            </a:r>
-            <a:endParaRPr lang="en-US" sz="1700" dirty="0"/>
-          </a:p>
-        </p:txBody>
-      </p:sp>
-      <p:sp>
-        <p:nvSpPr>
-          <p:cNvPr id="5" name="Text 3"/>
-          <p:cNvSpPr/>
-          <p:nvPr/>
-        </p:nvSpPr>
-        <p:spPr>
-          <a:xfrm>
-            <a:off x="640080" y="3703320"/>
-            <a:ext cx="7863840" cy="457200"/>
-          </a:xfrm>
-          <a:prstGeom prst="rect">
-            <a:avLst/>
-          </a:prstGeom>
-          <a:noFill/>
-          <a:ln/>
-        </p:spPr>
-        <p:txBody>
-          <a:bodyPr wrap="square" lIns="0" tIns="0" rIns="0" bIns="0" rtlCol="0" anchor="ctr"/>
-          <a:lstStyle/>
-          <a:p>
-            <a:pPr indent="0" marL="0">
-              <a:buNone/>
-            </a:pPr>
-            <a:r>
-              <a:rPr lang="en-US" sz="2000" b="1" i="1" dirty="0">
-                <a:solidFill>
-                  <a:srgbClr val="D4A843"/>
-                </a:solidFill>
-                <a:latin typeface="Georgia" pitchFamily="34" charset="0"/>
-                <a:ea typeface="Georgia" pitchFamily="34" charset="-122"/>
-                <a:cs typeface="Georgia" pitchFamily="34" charset="-120"/>
-              </a:rPr>
-              <a:t>Build software you can sell — and price it for the market it's actually in.</a:t>
+              <a:t>Build software you can sell — and a business this market can actually carry.</a:t>
             </a:r>
             <a:endParaRPr lang="en-US" sz="2000" dirty="0"/>
           </a:p>
@@ -3905,7 +3831,7 @@
         <p:spPr>
           <a:xfrm>
             <a:off x="640080" y="457200"/>
-            <a:ext cx="6400800" cy="274320"/>
+            <a:ext cx="7589520" cy="274320"/>
           </a:xfrm>
           <a:prstGeom prst="rect">
             <a:avLst/>
@@ -4007,7 +3933,7 @@
                 <a:ea typeface="Calibri" pitchFamily="34" charset="-122"/>
                 <a:cs typeface="Calibri" pitchFamily="34" charset="-120"/>
               </a:rPr>
-              <a:t>Software-as-a-professional-service, not SaaS. Pricing revised down to realistic Zimbabwean willingness-to-pay in USD.</a:t>
+              <a:t>Software-as-a-professional-service, not SaaS. Pricing set to realistic Zimbabwean willingness-to-pay in USD.</a:t>
             </a:r>
             <a:endParaRPr lang="en-US" sz="1300" dirty="0"/>
           </a:p>
@@ -4399,7 +4325,7 @@
                 <a:ea typeface="Calibri" pitchFamily="34" charset="-122"/>
                 <a:cs typeface="Calibri" pitchFamily="34" charset="-120"/>
               </a:rPr>
-              <a:t>We operate the platform on their behalf. The reliable, contractual spine — not adoption-dependent.</a:t>
+              <a:t>We operate the platform on their behalf. The reliable, contractual spine.</a:t>
             </a:r>
             <a:endParaRPr lang="en-US" sz="1100" dirty="0"/>
           </a:p>
@@ -4595,7 +4521,7 @@
                 <a:ea typeface="Calibri" pitchFamily="34" charset="-122"/>
                 <a:cs typeface="Calibri" pitchFamily="34" charset="-120"/>
               </a:rPr>
-              <a:t>Small but compounds with digital adoption. Sits on top of Paynow's own fee.</a:t>
+              <a:t>Small but compounds with adoption. Sits on top of Paynow's own fee.</a:t>
             </a:r>
             <a:endParaRPr lang="en-US" sz="1100" dirty="0"/>
           </a:p>
@@ -4793,7 +4719,7 @@
         <p:spPr>
           <a:xfrm>
             <a:off x="640080" y="457200"/>
-            <a:ext cx="6400800" cy="274320"/>
+            <a:ext cx="7589520" cy="274320"/>
           </a:xfrm>
           <a:prstGeom prst="rect">
             <a:avLst/>
@@ -4954,7 +4880,7 @@
               <a:buNone/>
             </a:pPr>
             <a:r>
-              <a:rPr lang="en-US" sz="1000" b="1" spc="100" kern="0" dirty="0">
+              <a:rPr lang="en-US" sz="1000" b="1" dirty="0">
                 <a:solidFill>
                   <a:srgbClr val="B85042"/>
                 </a:solidFill>
@@ -4971,7 +4897,7 @@
               <a:buNone/>
             </a:pPr>
             <a:r>
-              <a:rPr lang="en-US" sz="1000" b="1" spc="100" kern="0" dirty="0">
+              <a:rPr lang="en-US" sz="1000" b="1" dirty="0">
                 <a:solidFill>
                   <a:srgbClr val="B85042"/>
                 </a:solidFill>
@@ -5010,7 +4936,7 @@
               <a:buNone/>
             </a:pPr>
             <a:r>
-              <a:rPr lang="en-US" sz="1000" b="1" spc="100" kern="0" dirty="0">
+              <a:rPr lang="en-US" sz="1000" b="1" dirty="0">
                 <a:solidFill>
                   <a:srgbClr val="B85042"/>
                 </a:solidFill>
@@ -5027,7 +4953,7 @@
               <a:buNone/>
             </a:pPr>
             <a:r>
-              <a:rPr lang="en-US" sz="1000" b="1" spc="100" kern="0" dirty="0">
+              <a:rPr lang="en-US" sz="1000" b="1" dirty="0">
                 <a:solidFill>
                   <a:srgbClr val="B85042"/>
                 </a:solidFill>
@@ -5066,7 +4992,7 @@
               <a:buNone/>
             </a:pPr>
             <a:r>
-              <a:rPr lang="en-US" sz="1000" b="1" spc="100" kern="0" dirty="0">
+              <a:rPr lang="en-US" sz="1000" b="1" dirty="0">
                 <a:solidFill>
                   <a:srgbClr val="B85042"/>
                 </a:solidFill>
@@ -5105,7 +5031,7 @@
               <a:buNone/>
             </a:pPr>
             <a:r>
-              <a:rPr lang="en-US" sz="1000" b="1" spc="100" kern="0" dirty="0">
+              <a:rPr lang="en-US" sz="1000" b="1" dirty="0">
                 <a:solidFill>
                   <a:srgbClr val="B85042"/>
                 </a:solidFill>
@@ -5144,7 +5070,7 @@
               <a:buNone/>
             </a:pPr>
             <a:r>
-              <a:rPr lang="en-US" sz="1000" b="1" spc="100" kern="0" dirty="0">
+              <a:rPr lang="en-US" sz="1000" b="1" dirty="0">
                 <a:solidFill>
                   <a:srgbClr val="B85042"/>
                 </a:solidFill>
@@ -5696,7 +5622,7 @@
                 <a:ea typeface="Calibri" pitchFamily="34" charset="-122"/>
                 <a:cs typeface="Calibri" pitchFamily="34" charset="-120"/>
               </a:rPr>
-              <a:t>the business is sound per-unit. What's hard is amortizing the founder + support cost across enough houses — that's the real question, and it's the next slide.</a:t>
+              <a:t>the business is sound per-unit. There is no big fixed cost to amortize — the founder draws no salary — so each house's contribution is real income from the day it matures.</a:t>
             </a:r>
             <a:endParaRPr lang="en-US" sz="1150" dirty="0"/>
           </a:p>
@@ -5841,7 +5767,7 @@
         <p:spPr>
           <a:xfrm>
             <a:off x="640080" y="457200"/>
-            <a:ext cx="6400800" cy="274320"/>
+            <a:ext cx="7589520" cy="274320"/>
           </a:xfrm>
           <a:prstGeom prst="rect">
             <a:avLst/>
@@ -5865,7 +5791,7 @@
                 <a:ea typeface="Calibri" pitchFamily="34" charset="-122"/>
                 <a:cs typeface="Calibri" pitchFamily="34" charset="-120"/>
               </a:rPr>
-              <a:t>THE BASE CASE — “FLOOR”</a:t>
+              <a:t>THE BASE CASE — A BOOTSTRAP</a:t>
             </a:r>
             <a:endParaRPr lang="en-US" sz="1100" dirty="0"/>
           </a:p>
@@ -5904,7 +5830,7 @@
                 <a:ea typeface="Georgia" pitchFamily="34" charset="-122"/>
                 <a:cs typeface="Georgia" pitchFamily="34" charset="-120"/>
               </a:rPr>
-              <a:t>Three houses, 15% adoption. Investment-stage by design.</a:t>
+              <a:t>Cash-positive from the first live house.</a:t>
             </a:r>
             <a:endParaRPr lang="en-US" sz="3100" dirty="0"/>
           </a:p>
@@ -5943,7 +5869,7 @@
                 <a:ea typeface="Calibri" pitchFamily="34" charset="-122"/>
                 <a:cs typeface="Calibri" pitchFamily="34" charset="-120"/>
               </a:rPr>
-              <a:t>Deliberately conservative: one pilot lands ~month 6, a second by year 2, a third by year 3. This is the floor — what we earn if every percent of adoption is hard-won.</a:t>
+              <a:t>No external capital, no founder salary, no hire-ahead. The founder's income is the operating surplus. Three houses (1 → 2 → 3) over three years.</a:t>
             </a:r>
             <a:endParaRPr lang="en-US" sz="1300" dirty="0"/>
           </a:p>
@@ -6031,13 +5957,13 @@
             <a:r>
               <a:rPr lang="en-US" sz="2000" b="1" dirty="0">
                 <a:solidFill>
-                  <a:srgbClr val="B85042"/>
+                  <a:srgbClr val="5A7D5A"/>
                 </a:solidFill>
                 <a:latin typeface="Georgia" pitchFamily="34" charset="0"/>
                 <a:ea typeface="Georgia" pitchFamily="34" charset="-122"/>
                 <a:cs typeface="Georgia" pitchFamily="34" charset="-120"/>
               </a:rPr>
-              <a:t>−US$19,119</a:t>
+              <a:t>+US$6,081</a:t>
             </a:r>
             <a:pPr indent="0" marL="0">
               <a:buNone/>
@@ -6048,7 +5974,7 @@
                   <a:srgbClr val="7A4F47"/>
                 </a:solidFill>
               </a:rPr>
-              <a:t>  net</a:t>
+              <a:t>  income</a:t>
             </a:r>
             <a:endParaRPr lang="en-US" sz="2000" dirty="0"/>
           </a:p>
@@ -6087,7 +6013,7 @@
                 <a:ea typeface="Calibri" pitchFamily="34" charset="-122"/>
                 <a:cs typeface="Calibri" pitchFamily="34" charset="-120"/>
               </a:rPr>
-              <a:t>1 house live · rev US$12,321</a:t>
+              <a:t>1 house · rev US$12,321</a:t>
             </a:r>
             <a:endParaRPr lang="en-US" sz="950" dirty="0"/>
           </a:p>
@@ -6159,13 +6085,13 @@
             <a:r>
               <a:rPr lang="en-US" sz="2000" b="1" dirty="0">
                 <a:solidFill>
-                  <a:srgbClr val="B85042"/>
+                  <a:srgbClr val="5A7D5A"/>
                 </a:solidFill>
                 <a:latin typeface="Georgia" pitchFamily="34" charset="0"/>
                 <a:ea typeface="Georgia" pitchFamily="34" charset="-122"/>
                 <a:cs typeface="Georgia" pitchFamily="34" charset="-120"/>
               </a:rPr>
-              <a:t>−US$13,209</a:t>
+              <a:t>+US$17,591</a:t>
             </a:r>
             <a:pPr indent="0" marL="0">
               <a:buNone/>
@@ -6176,7 +6102,7 @@
                   <a:srgbClr val="7A4F47"/>
                 </a:solidFill>
               </a:rPr>
-              <a:t>  net</a:t>
+              <a:t>  income</a:t>
             </a:r>
             <a:endParaRPr lang="en-US" sz="2000" dirty="0"/>
           </a:p>
@@ -6215,7 +6141,7 @@
                 <a:ea typeface="Calibri" pitchFamily="34" charset="-122"/>
                 <a:cs typeface="Calibri" pitchFamily="34" charset="-120"/>
               </a:rPr>
-              <a:t>2 houses live · rev US$28,071</a:t>
+              <a:t>2 houses · rev US$28,071</a:t>
             </a:r>
             <a:endParaRPr lang="en-US" sz="950" dirty="0"/>
           </a:p>
@@ -6287,13 +6213,13 @@
             <a:r>
               <a:rPr lang="en-US" sz="2000" b="1" dirty="0">
                 <a:solidFill>
-                  <a:srgbClr val="B85042"/>
+                  <a:srgbClr val="5A7D5A"/>
                 </a:solidFill>
                 <a:latin typeface="Georgia" pitchFamily="34" charset="0"/>
                 <a:ea typeface="Georgia" pitchFamily="34" charset="-122"/>
                 <a:cs typeface="Georgia" pitchFamily="34" charset="-120"/>
               </a:rPr>
-              <a:t>−US$6,733</a:t>
+              <a:t>+US$32,267</a:t>
             </a:r>
             <a:pPr indent="0" marL="0">
               <a:buNone/>
@@ -6304,7 +6230,7 @@
                   <a:srgbClr val="7A4F47"/>
                 </a:solidFill>
               </a:rPr>
-              <a:t>  net</a:t>
+              <a:t>  income</a:t>
             </a:r>
             <a:endParaRPr lang="en-US" sz="2000" dirty="0"/>
           </a:p>
@@ -6343,7 +6269,7 @@
                 <a:ea typeface="Calibri" pitchFamily="34" charset="-122"/>
                 <a:cs typeface="Calibri" pitchFamily="34" charset="-120"/>
               </a:rPr>
-              <a:t>3 houses live · rev US$48,987</a:t>
+              <a:t>3 houses · rev US$48,987</a:t>
             </a:r>
             <a:endParaRPr lang="en-US" sz="950" dirty="0"/>
           </a:p>
@@ -6376,13 +6302,13 @@
             <a:r>
               <a:rPr lang="en-US" sz="1050" b="1" i="1" dirty="0">
                 <a:solidFill>
-                  <a:srgbClr val="2D1B1A"/>
-                </a:solidFill>
-                <a:latin typeface="Calibri" pitchFamily="34" charset="0"/>
-                <a:ea typeface="Calibri" pitchFamily="34" charset="-122"/>
-                <a:cs typeface="Calibri" pitchFamily="34" charset="-120"/>
-              </a:rPr>
-              <a:t>3-year totals:  </a:t>
+                  <a:srgbClr val="B85042"/>
+                </a:solidFill>
+                <a:latin typeface="Calibri" pitchFamily="34" charset="0"/>
+                <a:ea typeface="Calibri" pitchFamily="34" charset="-122"/>
+                <a:cs typeface="Calibri" pitchFamily="34" charset="-120"/>
+              </a:rPr>
+              <a:t>External capital required: US$0.  </a:t>
             </a:r>
             <a:pPr indent="0" marL="0">
               <a:buNone/>
@@ -6396,7 +6322,7 @@
                 <a:ea typeface="Calibri" pitchFamily="34" charset="-122"/>
                 <a:cs typeface="Calibri" pitchFamily="34" charset="-120"/>
               </a:rPr>
-              <a:t>revenue US$89,379 · costs US$128,440 · net −US$39,061.  Standalone break-even sits beyond the 3-year window.</a:t>
+              <a:t>The deepest the founder is ever out of pocket is US$2,250 (pre-launch months) — self-financed. Founder earns US$55,939 over 3 years.</a:t>
             </a:r>
             <a:endParaRPr lang="en-US" sz="1050" dirty="0"/>
           </a:p>
@@ -6541,7 +6467,7 @@
         <p:spPr>
           <a:xfrm>
             <a:off x="640080" y="457200"/>
-            <a:ext cx="6400800" cy="274320"/>
+            <a:ext cx="7589520" cy="274320"/>
           </a:xfrm>
           <a:prstGeom prst="rect">
             <a:avLst/>
@@ -6565,7 +6491,7 @@
                 <a:ea typeface="Calibri" pitchFamily="34" charset="-122"/>
                 <a:cs typeface="Calibri" pitchFamily="34" charset="-120"/>
               </a:rPr>
-              <a:t>THE BINDING CONSTRAINT</a:t>
+              <a:t>WHAT ACTUALLY MOVES IT</a:t>
             </a:r>
             <a:endParaRPr lang="en-US" sz="1100" dirty="0"/>
           </a:p>
@@ -6604,7 +6530,7 @@
                 <a:ea typeface="Georgia" pitchFamily="34" charset="-122"/>
                 <a:cs typeface="Georgia" pitchFamily="34" charset="-120"/>
               </a:rPr>
-              <a:t>It's a scale problem, not an adoption problem.</a:t>
+              <a:t>It's an operator-capacity problem, not an adoption one.</a:t>
             </a:r>
             <a:endParaRPr lang="en-US" sz="3100" dirty="0"/>
           </a:p>
@@ -6643,7 +6569,7 @@
                 <a:ea typeface="Calibri" pitchFamily="34" charset="-122"/>
                 <a:cs typeface="Calibri" pitchFamily="34" charset="-120"/>
               </a:rPr>
-              <a:t>Chasing higher digital adoption barely moves the floor. The transaction surcharge is tiny next to a paid founder + support base — what we need is more houses, not more clicks per house.</a:t>
+              <a:t>Chasing higher digital adoption barely moves income — the transaction surcharge is tiny. What grows the business is running more houses well.</a:t>
             </a:r>
             <a:endParaRPr lang="en-US" sz="1300" dirty="0"/>
           </a:p>
@@ -6674,7 +6600,7 @@
               <a:buNone/>
             </a:pPr>
             <a:r>
-              <a:rPr lang="en-US" sz="1000" b="1" spc="100" kern="0" dirty="0">
+              <a:rPr lang="en-US" sz="1000" b="1" dirty="0">
                 <a:solidFill>
                   <a:srgbClr val="B85042"/>
                 </a:solidFill>
@@ -6682,7 +6608,7 @@
                 <a:ea typeface="Calibri" pitchFamily="34" charset="-122"/>
                 <a:cs typeface="Calibri" pitchFamily="34" charset="-120"/>
               </a:rPr>
-              <a:t>PUSHING ADOPTION HARDER (3-house book, Y3 avg monthly net)</a:t>
+              <a:t>PUSHING ADOPTION HARDER (3-house book, Y3 avg monthly surplus)</a:t>
             </a:r>
             <a:endParaRPr lang="en-US" sz="1000" dirty="0"/>
           </a:p>
@@ -6754,13 +6680,13 @@
             <a:r>
               <a:rPr lang="en-US" sz="1400" b="1" dirty="0">
                 <a:solidFill>
-                  <a:srgbClr val="B85042"/>
+                  <a:srgbClr val="5A7D5A"/>
                 </a:solidFill>
                 <a:latin typeface="Georgia" pitchFamily="34" charset="0"/>
                 <a:ea typeface="Georgia" pitchFamily="34" charset="-122"/>
                 <a:cs typeface="Georgia" pitchFamily="34" charset="-120"/>
               </a:rPr>
-              <a:t>−US$978/mo</a:t>
+              <a:t>+US$2,522/mo</a:t>
             </a:r>
             <a:endParaRPr lang="en-US" sz="1400" dirty="0"/>
           </a:p>
@@ -6832,13 +6758,13 @@
             <a:r>
               <a:rPr lang="en-US" sz="1400" b="1" dirty="0">
                 <a:solidFill>
-                  <a:srgbClr val="B85042"/>
+                  <a:srgbClr val="5A7D5A"/>
                 </a:solidFill>
                 <a:latin typeface="Georgia" pitchFamily="34" charset="0"/>
                 <a:ea typeface="Georgia" pitchFamily="34" charset="-122"/>
                 <a:cs typeface="Georgia" pitchFamily="34" charset="-120"/>
               </a:rPr>
-              <a:t>−US$910/mo</a:t>
+              <a:t>+US$2,590/mo</a:t>
             </a:r>
             <a:endParaRPr lang="en-US" sz="1400" dirty="0"/>
           </a:p>
@@ -6910,13 +6836,13 @@
             <a:r>
               <a:rPr lang="en-US" sz="1400" b="1" dirty="0">
                 <a:solidFill>
-                  <a:srgbClr val="B85042"/>
+                  <a:srgbClr val="5A7D5A"/>
                 </a:solidFill>
                 <a:latin typeface="Georgia" pitchFamily="34" charset="0"/>
                 <a:ea typeface="Georgia" pitchFamily="34" charset="-122"/>
                 <a:cs typeface="Georgia" pitchFamily="34" charset="-120"/>
               </a:rPr>
-              <a:t>−US$842/mo</a:t>
+              <a:t>+US$2,658/mo</a:t>
             </a:r>
             <a:endParaRPr lang="en-US" sz="1400" dirty="0"/>
           </a:p>
@@ -6988,13 +6914,13 @@
             <a:r>
               <a:rPr lang="en-US" sz="1400" b="1" dirty="0">
                 <a:solidFill>
-                  <a:srgbClr val="B85042"/>
+                  <a:srgbClr val="5A7D5A"/>
                 </a:solidFill>
                 <a:latin typeface="Georgia" pitchFamily="34" charset="0"/>
                 <a:ea typeface="Georgia" pitchFamily="34" charset="-122"/>
                 <a:cs typeface="Georgia" pitchFamily="34" charset="-120"/>
               </a:rPr>
-              <a:t>−US$776/mo</a:t>
+              <a:t>+US$2,724/mo</a:t>
             </a:r>
             <a:endParaRPr lang="en-US" sz="1400" dirty="0"/>
           </a:p>
@@ -7033,7 +6959,7 @@
                 <a:ea typeface="Calibri" pitchFamily="34" charset="-122"/>
                 <a:cs typeface="Calibri" pitchFamily="34" charset="-120"/>
               </a:rPr>
-              <a:t>Doubling adoption recovers ~US$200/mo. It does not get us to profit.</a:t>
+              <a:t>Doubling adoption recovers only ~US$200/mo. It is not the lever.</a:t>
             </a:r>
             <a:endParaRPr lang="en-US" sz="1050" dirty="0"/>
           </a:p>
@@ -7162,7 +7088,7 @@
                   <a:srgbClr val="BFAA98"/>
                 </a:solidFill>
               </a:rPr>
-              <a:t>  contribution / mature house / yr</a:t>
+              <a:t>  income per mature house / yr</a:t>
             </a:r>
             <a:endParaRPr lang="en-US" sz="2200" dirty="0"/>
           </a:p>
@@ -7176,8 +7102,8 @@
         </p:nvSpPr>
         <p:spPr>
           <a:xfrm>
-            <a:off x="5166360" y="3291840"/>
-            <a:ext cx="3200400" cy="502920"/>
+            <a:off x="5166360" y="3337560"/>
+            <a:ext cx="3200400" cy="1143000"/>
           </a:xfrm>
           <a:prstGeom prst="rect">
             <a:avLst/>
@@ -7193,73 +7119,23 @@
               <a:buNone/>
             </a:pPr>
             <a:r>
-              <a:rPr lang="en-US" sz="2200" b="1" dirty="0">
-                <a:solidFill>
-                  <a:srgbClr val="F5E6D3"/>
-                </a:solidFill>
-                <a:latin typeface="Georgia" pitchFamily="34" charset="0"/>
-                <a:ea typeface="Georgia" pitchFamily="34" charset="-122"/>
-                <a:cs typeface="Georgia" pitchFamily="34" charset="-120"/>
-              </a:rPr>
-              <a:t>~US$48–55k</a:t>
-            </a:r>
-            <a:pPr indent="0" marL="0">
-              <a:buNone/>
-            </a:pPr>
-            <a:r>
-              <a:rPr lang="en-US" sz="1200" dirty="0">
-                <a:solidFill>
-                  <a:srgbClr val="BFAA98"/>
-                </a:solidFill>
-              </a:rPr>
-              <a:t>  annual fixed cost (founder + support)</a:t>
-            </a:r>
-            <a:endParaRPr lang="en-US" sz="2200" dirty="0"/>
+              <a:rPr lang="en-US" sz="1150" dirty="0">
+                <a:solidFill>
+                  <a:srgbClr val="D4A843"/>
+                </a:solidFill>
+                <a:latin typeface="Calibri" pitchFamily="34" charset="0"/>
+                <a:ea typeface="Calibri" pitchFamily="34" charset="-122"/>
+                <a:cs typeface="Calibri" pitchFamily="34" charset="-120"/>
+              </a:rPr>
+              <a:t>→  Grow by adding houses, each funded from the surplus of the last. No salary to cover, so every new house is income — until the ceiling, which is how many one owner + cheap part-time help can run well.</a:t>
+            </a:r>
+            <a:endParaRPr lang="en-US" sz="1150" dirty="0"/>
           </a:p>
         </p:txBody>
       </p:sp>
       <p:sp>
         <p:nvSpPr>
           <p:cNvPr id="21" name="Text 19"/>
-          <p:cNvSpPr/>
-          <p:nvPr/>
-        </p:nvSpPr>
-        <p:spPr>
-          <a:xfrm>
-            <a:off x="5166360" y="3886200"/>
-            <a:ext cx="3200400" cy="594360"/>
-          </a:xfrm>
-          <a:prstGeom prst="rect">
-            <a:avLst/>
-          </a:prstGeom>
-          <a:noFill/>
-          <a:ln/>
-        </p:spPr>
-        <p:txBody>
-          <a:bodyPr wrap="square" lIns="0" tIns="0" rIns="0" bIns="0" rtlCol="0" anchor="ctr"/>
-          <a:lstStyle/>
-          <a:p>
-            <a:pPr indent="0" marL="0">
-              <a:buNone/>
-            </a:pPr>
-            <a:r>
-              <a:rPr lang="en-US" sz="1100" dirty="0">
-                <a:solidFill>
-                  <a:srgbClr val="D4A843"/>
-                </a:solidFill>
-                <a:latin typeface="Calibri" pitchFamily="34" charset="0"/>
-                <a:ea typeface="Calibri" pitchFamily="34" charset="-122"/>
-                <a:cs typeface="Calibri" pitchFamily="34" charset="-120"/>
-              </a:rPr>
-              <a:t>→  Break-even needs ~5–6 houses in the book with the early ones matured — or a leaner founder cost, or the upside rails on the next slides.</a:t>
-            </a:r>
-            <a:endParaRPr lang="en-US" sz="1100" dirty="0"/>
-          </a:p>
-        </p:txBody>
-      </p:sp>
-      <p:sp>
-        <p:nvSpPr>
-          <p:cNvPr id="22" name="Text 20"/>
           <p:cNvSpPr/>
           <p:nvPr/>
         </p:nvSpPr>
@@ -7298,7 +7174,7 @@
       </p:sp>
       <p:sp>
         <p:nvSpPr>
-          <p:cNvPr id="23" name="Text 21"/>
+          <p:cNvPr id="22" name="Text 20"/>
           <p:cNvSpPr/>
           <p:nvPr/>
         </p:nvSpPr>
@@ -7396,7 +7272,7 @@
         <p:spPr>
           <a:xfrm>
             <a:off x="640080" y="457200"/>
-            <a:ext cx="6400800" cy="274320"/>
+            <a:ext cx="7589520" cy="274320"/>
           </a:xfrm>
           <a:prstGeom prst="rect">
             <a:avLst/>
@@ -7932,7 +7808,7 @@
         <p:spPr>
           <a:xfrm>
             <a:off x="640080" y="457200"/>
-            <a:ext cx="6400800" cy="274320"/>
+            <a:ext cx="7589520" cy="274320"/>
           </a:xfrm>
           <a:prstGeom prst="rect">
             <a:avLst/>
@@ -8763,7 +8639,7 @@
         <p:spPr>
           <a:xfrm>
             <a:off x="640080" y="457200"/>
-            <a:ext cx="6400800" cy="274320"/>
+            <a:ext cx="7589520" cy="274320"/>
           </a:xfrm>
           <a:prstGeom prst="rect">
             <a:avLst/>
@@ -8787,7 +8663,7 @@
                 <a:ea typeface="Calibri" pitchFamily="34" charset="-122"/>
                 <a:cs typeface="Calibri" pitchFamily="34" charset="-120"/>
               </a:rPr>
-              <a:t>THE PATH TO VIABILITY — UPSIDE, NOT BASE CASE</a:t>
+              <a:t>HOW IT GROWS — WITHOUT A RAISE</a:t>
             </a:r>
             <a:endParaRPr lang="en-US" sz="1100" dirty="0"/>
           </a:p>
@@ -8826,7 +8702,7 @@
                 <a:ea typeface="Georgia" pitchFamily="34" charset="-122"/>
                 <a:cs typeface="Georgia" pitchFamily="34" charset="-120"/>
               </a:rPr>
-              <a:t>With scale, it crosses break-even in year 3.</a:t>
+              <a:t>Each house's surplus funds the next.</a:t>
             </a:r>
             <a:endParaRPr lang="en-US" sz="3100" dirty="0"/>
           </a:p>
@@ -8865,7 +8741,7 @@
                 <a:ea typeface="Calibri" pitchFamily="34" charset="-122"/>
                 <a:cs typeface="Calibri" pitchFamily="34" charset="-120"/>
               </a:rPr>
-              <a:t>Same product, executed faster: 6 houses by month 44, 20% adoption, and the transport margin layered in. Cumulative net turns positive in year 3 and compounds.</a:t>
+              <a:t>There is no funding round because there is nowhere to raise one. Growth is paid for out of operating surplus — slow, self-funded, and durable.</a:t>
             </a:r>
             <a:endParaRPr lang="en-US" sz="1300" dirty="0"/>
           </a:p>
@@ -8878,8 +8754,8 @@
           <p:nvPr/>
         </p:nvGraphicFramePr>
         <p:xfrm>
-          <a:off x="640080" y="2286000"/>
-          <a:ext cx="5303520" cy="2286000"/>
+          <a:off x="640080" y="2331720"/>
+          <a:ext cx="5029200" cy="2240280"/>
         </p:xfrm>
         <a:graphic xmlns:a="http://schemas.openxmlformats.org/drawingml/2006/main">
           <a:graphicData uri="http://schemas.openxmlformats.org/drawingml/2006/chart">
@@ -8895,8 +8771,8 @@
         </p:nvSpPr>
         <p:spPr>
           <a:xfrm>
-            <a:off x="3108960" y="3063240"/>
-            <a:ext cx="1280160" cy="228600"/>
+            <a:off x="5897880" y="2286000"/>
+            <a:ext cx="2697480" cy="274320"/>
           </a:xfrm>
           <a:prstGeom prst="rect">
             <a:avLst/>
@@ -8912,147 +8788,30 @@
               <a:buNone/>
             </a:pPr>
             <a:r>
-              <a:rPr lang="en-US" sz="900" b="1" spc="200" kern="0" dirty="0">
-                <a:solidFill>
-                  <a:srgbClr val="5A7D5A"/>
-                </a:solidFill>
-                <a:latin typeface="Calibri" pitchFamily="34" charset="0"/>
-                <a:ea typeface="Calibri" pitchFamily="34" charset="-122"/>
-                <a:cs typeface="Calibri" pitchFamily="34" charset="-120"/>
-              </a:rPr>
-              <a:t>BREAK-EVEN</a:t>
-            </a:r>
-            <a:endParaRPr lang="en-US" sz="900" dirty="0"/>
-          </a:p>
-        </p:txBody>
-      </p:sp>
-      <p:sp>
-        <p:nvSpPr>
-          <p:cNvPr id="8" name="Text 5"/>
-          <p:cNvSpPr/>
-          <p:nvPr/>
-        </p:nvSpPr>
-        <p:spPr>
-          <a:xfrm>
-            <a:off x="3108960" y="3273552"/>
-            <a:ext cx="1280160" cy="228600"/>
-          </a:xfrm>
-          <a:prstGeom prst="rect">
-            <a:avLst/>
-          </a:prstGeom>
-          <a:noFill/>
-          <a:ln/>
-        </p:spPr>
-        <p:txBody>
-          <a:bodyPr wrap="square" lIns="0" tIns="0" rIns="0" bIns="0" rtlCol="0" anchor="ctr"/>
-          <a:lstStyle/>
-          <a:p>
-            <a:pPr indent="0" marL="0">
-              <a:buNone/>
-            </a:pPr>
-            <a:r>
-              <a:rPr lang="en-US" sz="1000" i="1" dirty="0">
-                <a:solidFill>
-                  <a:srgbClr val="7A4F47"/>
-                </a:solidFill>
-                <a:latin typeface="Calibri" pitchFamily="34" charset="0"/>
-                <a:ea typeface="Calibri" pitchFamily="34" charset="-122"/>
-                <a:cs typeface="Calibri" pitchFamily="34" charset="-120"/>
-              </a:rPr>
-              <a:t>month 36</a:t>
-            </a:r>
-            <a:endParaRPr lang="en-US" sz="1000" dirty="0"/>
-          </a:p>
-        </p:txBody>
-      </p:sp>
-      <p:sp>
-        <p:nvSpPr>
-          <p:cNvPr id="9" name="Text 6"/>
-          <p:cNvSpPr/>
-          <p:nvPr/>
-        </p:nvSpPr>
-        <p:spPr>
-          <a:xfrm>
-            <a:off x="6172200" y="2377440"/>
-            <a:ext cx="2377440" cy="228600"/>
-          </a:xfrm>
-          <a:prstGeom prst="rect">
-            <a:avLst/>
-          </a:prstGeom>
-          <a:noFill/>
-          <a:ln/>
-        </p:spPr>
-        <p:txBody>
-          <a:bodyPr wrap="square" lIns="0" tIns="0" rIns="0" bIns="0" rtlCol="0" anchor="ctr"/>
-          <a:lstStyle/>
-          <a:p>
-            <a:pPr indent="0" marL="0">
-              <a:buNone/>
-            </a:pPr>
-            <a:r>
-              <a:rPr lang="en-US" sz="900" b="1" spc="100" kern="0" dirty="0">
-                <a:solidFill>
-                  <a:srgbClr val="7A4F47"/>
-                </a:solidFill>
-                <a:latin typeface="Calibri" pitchFamily="34" charset="0"/>
-                <a:ea typeface="Calibri" pitchFamily="34" charset="-122"/>
-                <a:cs typeface="Calibri" pitchFamily="34" charset="-120"/>
-              </a:rPr>
-              <a:t>YEAR 3 NET</a:t>
-            </a:r>
-            <a:endParaRPr lang="en-US" sz="900" dirty="0"/>
-          </a:p>
-        </p:txBody>
-      </p:sp>
-      <p:sp>
-        <p:nvSpPr>
-          <p:cNvPr id="10" name="Text 7"/>
-          <p:cNvSpPr/>
-          <p:nvPr/>
-        </p:nvSpPr>
-        <p:spPr>
-          <a:xfrm>
-            <a:off x="6172200" y="2578608"/>
-            <a:ext cx="2377440" cy="365760"/>
-          </a:xfrm>
-          <a:prstGeom prst="rect">
-            <a:avLst/>
-          </a:prstGeom>
-          <a:noFill/>
-          <a:ln/>
-        </p:spPr>
-        <p:txBody>
-          <a:bodyPr wrap="square" lIns="0" tIns="0" rIns="0" bIns="0" rtlCol="0" anchor="ctr"/>
-          <a:lstStyle/>
-          <a:p>
-            <a:pPr indent="0" marL="0">
-              <a:buNone/>
-            </a:pPr>
-            <a:r>
-              <a:rPr lang="en-US" sz="1900" b="1" dirty="0">
-                <a:solidFill>
-                  <a:srgbClr val="5A7D5A"/>
+              <a:rPr lang="en-US" sz="1350" b="1" dirty="0">
+                <a:solidFill>
+                  <a:srgbClr val="B85042"/>
                 </a:solidFill>
                 <a:latin typeface="Georgia" pitchFamily="34" charset="0"/>
                 <a:ea typeface="Georgia" pitchFamily="34" charset="-122"/>
                 <a:cs typeface="Georgia" pitchFamily="34" charset="-120"/>
               </a:rPr>
-              <a:t>+US$23,204</a:t>
-            </a:r>
-            <a:endParaRPr lang="en-US" sz="1900" dirty="0"/>
-          </a:p>
-        </p:txBody>
-      </p:sp>
-      <p:sp>
-        <p:nvSpPr>
-          <p:cNvPr id="11" name="Text 8"/>
-          <p:cNvSpPr/>
-          <p:nvPr/>
-        </p:nvSpPr>
-        <p:spPr>
-          <a:xfrm>
-            <a:off x="6172200" y="3090672"/>
-            <a:ext cx="2377440" cy="228600"/>
+              <a:t>Reinvest, don't raise</a:t>
+            </a:r>
+            <a:endParaRPr lang="en-US" sz="1350" dirty="0"/>
+          </a:p>
+        </p:txBody>
+      </p:sp>
+      <p:sp>
+        <p:nvSpPr>
+          <p:cNvPr id="8" name="Text 5"/>
+          <p:cNvSpPr/>
+          <p:nvPr/>
+        </p:nvSpPr>
+        <p:spPr>
+          <a:xfrm>
+            <a:off x="5897880" y="2542032"/>
+            <a:ext cx="2697480" cy="502920"/>
           </a:xfrm>
           <a:prstGeom prst="rect">
             <a:avLst/>
@@ -9068,7 +8827,7 @@
               <a:buNone/>
             </a:pPr>
             <a:r>
-              <a:rPr lang="en-US" sz="900" b="1" spc="100" kern="0" dirty="0">
+              <a:rPr lang="en-US" sz="1000" dirty="0">
                 <a:solidFill>
                   <a:srgbClr val="7A4F47"/>
                 </a:solidFill>
@@ -9076,22 +8835,22 @@
                 <a:ea typeface="Calibri" pitchFamily="34" charset="-122"/>
                 <a:cs typeface="Calibri" pitchFamily="34" charset="-120"/>
               </a:rPr>
-              <a:t>YEAR 5 NET</a:t>
-            </a:r>
-            <a:endParaRPr lang="en-US" sz="900" dirty="0"/>
-          </a:p>
-        </p:txBody>
-      </p:sp>
-      <p:sp>
-        <p:nvSpPr>
-          <p:cNvPr id="12" name="Text 9"/>
-          <p:cNvSpPr/>
-          <p:nvPr/>
-        </p:nvSpPr>
-        <p:spPr>
-          <a:xfrm>
-            <a:off x="6172200" y="3291840"/>
-            <a:ext cx="2377440" cy="365760"/>
+              <a:t>Surplus from house #1 pays the part-time help that lets the founder take on house #2.</a:t>
+            </a:r>
+            <a:endParaRPr lang="en-US" sz="1000" dirty="0"/>
+          </a:p>
+        </p:txBody>
+      </p:sp>
+      <p:sp>
+        <p:nvSpPr>
+          <p:cNvPr id="9" name="Text 6"/>
+          <p:cNvSpPr/>
+          <p:nvPr/>
+        </p:nvSpPr>
+        <p:spPr>
+          <a:xfrm>
+            <a:off x="5897880" y="3063240"/>
+            <a:ext cx="2697480" cy="274320"/>
           </a:xfrm>
           <a:prstGeom prst="rect">
             <a:avLst/>
@@ -9107,30 +8866,30 @@
               <a:buNone/>
             </a:pPr>
             <a:r>
-              <a:rPr lang="en-US" sz="1900" b="1" dirty="0">
-                <a:solidFill>
-                  <a:srgbClr val="5A7D5A"/>
+              <a:rPr lang="en-US" sz="1350" b="1" dirty="0">
+                <a:solidFill>
+                  <a:srgbClr val="B85042"/>
                 </a:solidFill>
                 <a:latin typeface="Georgia" pitchFamily="34" charset="0"/>
                 <a:ea typeface="Georgia" pitchFamily="34" charset="-122"/>
                 <a:cs typeface="Georgia" pitchFamily="34" charset="-120"/>
               </a:rPr>
-              <a:t>+US$55,411</a:t>
-            </a:r>
-            <a:endParaRPr lang="en-US" sz="1900" dirty="0"/>
-          </a:p>
-        </p:txBody>
-      </p:sp>
-      <p:sp>
-        <p:nvSpPr>
-          <p:cNvPr id="13" name="Text 10"/>
-          <p:cNvSpPr/>
-          <p:nvPr/>
-        </p:nvSpPr>
-        <p:spPr>
-          <a:xfrm>
-            <a:off x="6172200" y="3803904"/>
-            <a:ext cx="2377440" cy="228600"/>
+              <a:t>Compounds slowly</a:t>
+            </a:r>
+            <a:endParaRPr lang="en-US" sz="1350" dirty="0"/>
+          </a:p>
+        </p:txBody>
+      </p:sp>
+      <p:sp>
+        <p:nvSpPr>
+          <p:cNvPr id="10" name="Text 7"/>
+          <p:cNvSpPr/>
+          <p:nvPr/>
+        </p:nvSpPr>
+        <p:spPr>
+          <a:xfrm>
+            <a:off x="5897880" y="3319272"/>
+            <a:ext cx="2697480" cy="502920"/>
           </a:xfrm>
           <a:prstGeom prst="rect">
             <a:avLst/>
@@ -9146,7 +8905,7 @@
               <a:buNone/>
             </a:pPr>
             <a:r>
-              <a:rPr lang="en-US" sz="900" b="1" spc="100" kern="0" dirty="0">
+              <a:rPr lang="en-US" sz="1000" dirty="0">
                 <a:solidFill>
                   <a:srgbClr val="7A4F47"/>
                 </a:solidFill>
@@ -9154,22 +8913,22 @@
                 <a:ea typeface="Calibri" pitchFamily="34" charset="-122"/>
                 <a:cs typeface="Calibri" pitchFamily="34" charset="-120"/>
               </a:rPr>
-              <a:t>CUMULATIVE @ MONTH 60</a:t>
-            </a:r>
-            <a:endParaRPr lang="en-US" sz="900" dirty="0"/>
-          </a:p>
-        </p:txBody>
-      </p:sp>
-      <p:sp>
-        <p:nvSpPr>
-          <p:cNvPr id="14" name="Text 11"/>
-          <p:cNvSpPr/>
-          <p:nvPr/>
-        </p:nvSpPr>
-        <p:spPr>
-          <a:xfrm>
-            <a:off x="6172200" y="4005072"/>
-            <a:ext cx="2377440" cy="365760"/>
+              <a:t>Income roughly quintuples Y1→Y3 (US$6k → US$18k → US$32k) — on no outside money.</a:t>
+            </a:r>
+            <a:endParaRPr lang="en-US" sz="1000" dirty="0"/>
+          </a:p>
+        </p:txBody>
+      </p:sp>
+      <p:sp>
+        <p:nvSpPr>
+          <p:cNvPr id="11" name="Text 8"/>
+          <p:cNvSpPr/>
+          <p:nvPr/>
+        </p:nvSpPr>
+        <p:spPr>
+          <a:xfrm>
+            <a:off x="5897880" y="3840480"/>
+            <a:ext cx="2697480" cy="274320"/>
           </a:xfrm>
           <a:prstGeom prst="rect">
             <a:avLst/>
@@ -9185,7 +8944,7 @@
               <a:buNone/>
             </a:pPr>
             <a:r>
-              <a:rPr lang="en-US" sz="1900" b="1" dirty="0">
+              <a:rPr lang="en-US" sz="1350" b="1" dirty="0">
                 <a:solidFill>
                   <a:srgbClr val="B85042"/>
                 </a:solidFill>
@@ -9193,15 +8952,54 @@
                 <a:ea typeface="Georgia" pitchFamily="34" charset="-122"/>
                 <a:cs typeface="Georgia" pitchFamily="34" charset="-120"/>
               </a:rPr>
-              <a:t>+US$103,345</a:t>
-            </a:r>
-            <a:endParaRPr lang="en-US" sz="1900" dirty="0"/>
-          </a:p>
-        </p:txBody>
-      </p:sp>
-      <p:sp>
-        <p:nvSpPr>
-          <p:cNvPr id="15" name="Text 12"/>
+              <a:t>Ceiling is people, not cash</a:t>
+            </a:r>
+            <a:endParaRPr lang="en-US" sz="1350" dirty="0"/>
+          </a:p>
+        </p:txBody>
+      </p:sp>
+      <p:sp>
+        <p:nvSpPr>
+          <p:cNvPr id="12" name="Text 9"/>
+          <p:cNvSpPr/>
+          <p:nvPr/>
+        </p:nvSpPr>
+        <p:spPr>
+          <a:xfrm>
+            <a:off x="5897880" y="4096512"/>
+            <a:ext cx="2697480" cy="502920"/>
+          </a:xfrm>
+          <a:prstGeom prst="rect">
+            <a:avLst/>
+          </a:prstGeom>
+          <a:noFill/>
+          <a:ln/>
+        </p:spPr>
+        <p:txBody>
+          <a:bodyPr wrap="square" lIns="0" tIns="0" rIns="0" bIns="0" rtlCol="0" anchor="ctr"/>
+          <a:lstStyle/>
+          <a:p>
+            <a:pPr indent="0" marL="0">
+              <a:buNone/>
+            </a:pPr>
+            <a:r>
+              <a:rPr lang="en-US" sz="1000" dirty="0">
+                <a:solidFill>
+                  <a:srgbClr val="7A4F47"/>
+                </a:solidFill>
+                <a:latin typeface="Calibri" pitchFamily="34" charset="0"/>
+                <a:ea typeface="Calibri" pitchFamily="34" charset="-122"/>
+                <a:cs typeface="Calibri" pitchFamily="34" charset="-120"/>
+              </a:rPr>
+              <a:t>Growth caps at how many houses an owner + helpers can run well — then you hire from surplus, never from a raise.</a:t>
+            </a:r>
+            <a:endParaRPr lang="en-US" sz="1000" dirty="0"/>
+          </a:p>
+        </p:txBody>
+      </p:sp>
+      <p:sp>
+        <p:nvSpPr>
+          <p:cNvPr id="13" name="Text 10"/>
           <p:cNvSpPr/>
           <p:nvPr/>
         </p:nvSpPr>
@@ -9232,7 +9030,7 @@
                 <a:ea typeface="Calibri" pitchFamily="34" charset="-122"/>
                 <a:cs typeface="Calibri" pitchFamily="34" charset="-120"/>
               </a:rPr>
-              <a:t>Labeled as upside on purpose. We do not assume it in planning — we earn our way to it.</a:t>
+              <a:t>Conservative by necessity: a Zimbabwean startup that cannot raise must be cash-positive — so we built one that is.</a:t>
             </a:r>
             <a:endParaRPr lang="en-US" sz="1050" dirty="0"/>
           </a:p>
@@ -9240,7 +9038,7 @@
       </p:sp>
       <p:sp>
         <p:nvSpPr>
-          <p:cNvPr id="16" name="Text 13"/>
+          <p:cNvPr id="14" name="Text 11"/>
           <p:cNvSpPr/>
           <p:nvPr/>
         </p:nvSpPr>
@@ -9279,7 +9077,7 @@
       </p:sp>
       <p:sp>
         <p:nvSpPr>
-          <p:cNvPr id="17" name="Text 14"/>
+          <p:cNvPr id="15" name="Text 12"/>
           <p:cNvSpPr/>
           <p:nvPr/>
         </p:nvSpPr>
@@ -9377,7 +9175,7 @@
         <p:spPr>
           <a:xfrm>
             <a:off x="640080" y="457200"/>
-            <a:ext cx="6400800" cy="274320"/>
+            <a:ext cx="7589520" cy="274320"/>
           </a:xfrm>
           <a:prstGeom prst="rect">
             <a:avLst/>
@@ -9401,7 +9199,7 @@
                 <a:ea typeface="Calibri" pitchFamily="34" charset="-122"/>
                 <a:cs typeface="Calibri" pitchFamily="34" charset="-120"/>
               </a:rPr>
-              <a:t>WHAT MOVES THE NEEDLE</a:t>
+              <a:t>WHAT WE'RE WATCHING</a:t>
             </a:r>
             <a:endParaRPr lang="en-US" sz="1100" dirty="0"/>
           </a:p>
@@ -9440,7 +9238,7 @@
                 <a:ea typeface="Georgia" pitchFamily="34" charset="-122"/>
                 <a:cs typeface="Georgia" pitchFamily="34" charset="-120"/>
               </a:rPr>
-              <a:t>Four levers between the floor and the path.</a:t>
+              <a:t>Four risks specific to building this here.</a:t>
             </a:r>
             <a:endParaRPr lang="en-US" sz="3100" dirty="0"/>
           </a:p>
@@ -9479,7 +9277,7 @@
                 <a:ea typeface="Calibri" pitchFamily="34" charset="-122"/>
                 <a:cs typeface="Calibri" pitchFamily="34" charset="-120"/>
               </a:rPr>
-              <a:t>Ranked by impact. The first is ours to execute; the last three are largely unblocked by Paynow.</a:t>
+              <a:t>Honest about the things that don't show up in a first-world model.</a:t>
             </a:r>
             <a:endParaRPr lang="en-US" sz="1300" dirty="0"/>
           </a:p>
@@ -9596,7 +9394,7 @@
               <a:buNone/>
             </a:pPr>
             <a:r>
-              <a:rPr lang="en-US" sz="1500" b="1" dirty="0">
+              <a:rPr lang="en-US" sz="1450" b="1" dirty="0">
                 <a:solidFill>
                   <a:srgbClr val="2D1B1A"/>
                 </a:solidFill>
@@ -9604,9 +9402,9 @@
                 <a:ea typeface="Georgia" pitchFamily="34" charset="-122"/>
                 <a:cs typeface="Georgia" pitchFamily="34" charset="-120"/>
               </a:rPr>
-              <a:t>More houses, sooner</a:t>
-            </a:r>
-            <a:endParaRPr lang="en-US" sz="1500" dirty="0"/>
+              <a:t>USD scarcity &amp; cash habits</a:t>
+            </a:r>
+            <a:endParaRPr lang="en-US" sz="1450" dirty="0"/>
           </a:p>
         </p:txBody>
       </p:sp>
@@ -9635,7 +9433,7 @@
               <a:buNone/>
             </a:pPr>
             <a:r>
-              <a:rPr lang="en-US" sz="1050" dirty="0">
+              <a:rPr lang="en-US" sz="1000" dirty="0">
                 <a:solidFill>
                   <a:srgbClr val="7A4F47"/>
                 </a:solidFill>
@@ -9643,9 +9441,9 @@
                 <a:ea typeface="Calibri" pitchFamily="34" charset="-122"/>
                 <a:cs typeface="Calibri" pitchFamily="34" charset="-120"/>
               </a:rPr>
-              <a:t>The dominant lever. Each mature house adds ~US$15–21k contribution. 2 signings/yr instead of 1 is the difference between floor and path.</a:t>
-            </a:r>
-            <a:endParaRPr lang="en-US" sz="1050" dirty="0"/>
+              <a:t>Buyers and houses transact in cash; USD is tight. Mitigation: meet them on every rail (USSD, BillPay, Paab) so digital is easier than cash.</a:t>
+            </a:r>
+            <a:endParaRPr lang="en-US" sz="1000" dirty="0"/>
           </a:p>
         </p:txBody>
       </p:sp>
@@ -9760,7 +9558,7 @@
               <a:buNone/>
             </a:pPr>
             <a:r>
-              <a:rPr lang="en-US" sz="1500" b="1" dirty="0">
+              <a:rPr lang="en-US" sz="1450" b="1" dirty="0">
                 <a:solidFill>
                   <a:srgbClr val="2D1B1A"/>
                 </a:solidFill>
@@ -9768,9 +9566,9 @@
                 <a:ea typeface="Georgia" pitchFamily="34" charset="-122"/>
                 <a:cs typeface="Georgia" pitchFamily="34" charset="-120"/>
               </a:rPr>
-              <a:t>Transport margin</a:t>
-            </a:r>
-            <a:endParaRPr lang="en-US" sz="1500" dirty="0"/>
+              <a:t>Currency volatility</a:t>
+            </a:r>
+            <a:endParaRPr lang="en-US" sz="1450" dirty="0"/>
           </a:p>
         </p:txBody>
       </p:sp>
@@ -9799,7 +9597,7 @@
               <a:buNone/>
             </a:pPr>
             <a:r>
-              <a:rPr lang="en-US" sz="1050" dirty="0">
+              <a:rPr lang="en-US" sz="1000" dirty="0">
                 <a:solidFill>
                   <a:srgbClr val="7A4F47"/>
                 </a:solidFill>
@@ -9807,9 +9605,9 @@
                 <a:ea typeface="Calibri" pitchFamily="34" charset="-122"/>
                 <a:cs typeface="Calibri" pitchFamily="34" charset="-120"/>
               </a:rPr>
-              <a:t>Already shipped: US$15 base + US$0.35/km, capped US$250. A per-delivery margin that scales with volume, excluded from the base case.</a:t>
-            </a:r>
-            <a:endParaRPr lang="en-US" sz="1050" dirty="0"/>
+              <a:t>ZWL/ZiG swings wipe out local-currency margins. Mitigation: all pricing in USD; surcharge invoiced on USD-equivalent settled.</a:t>
+            </a:r>
+            <a:endParaRPr lang="en-US" sz="1000" dirty="0"/>
           </a:p>
         </p:txBody>
       </p:sp>
@@ -9924,7 +9722,7 @@
               <a:buNone/>
             </a:pPr>
             <a:r>
-              <a:rPr lang="en-US" sz="1500" b="1" dirty="0">
+              <a:rPr lang="en-US" sz="1450" b="1" dirty="0">
                 <a:solidFill>
                   <a:srgbClr val="2D1B1A"/>
                 </a:solidFill>
@@ -9932,9 +9730,9 @@
                 <a:ea typeface="Georgia" pitchFamily="34" charset="-122"/>
                 <a:cs typeface="Georgia" pitchFamily="34" charset="-120"/>
               </a:rPr>
-              <a:t>Paab + BillPay rails</a:t>
-            </a:r>
-            <a:endParaRPr lang="en-US" sz="1500" dirty="0"/>
+              <a:t>No capital cushion</a:t>
+            </a:r>
+            <a:endParaRPr lang="en-US" sz="1450" dirty="0"/>
           </a:p>
         </p:txBody>
       </p:sp>
@@ -9963,7 +9761,7 @@
               <a:buNone/>
             </a:pPr>
             <a:r>
-              <a:rPr lang="en-US" sz="1050" dirty="0">
+              <a:rPr lang="en-US" sz="1000" dirty="0">
                 <a:solidFill>
                   <a:srgbClr val="7A4F47"/>
                 </a:solidFill>
@@ -9971,9 +9769,9 @@
                 <a:ea typeface="Calibri" pitchFamily="34" charset="-122"/>
                 <a:cs typeface="Calibri" pitchFamily="34" charset="-120"/>
               </a:rPr>
-              <a:t>Unblock cash-in (Paab) and BillPay-PAY and the addressable buyer base widens past smartphone users — lifting adoption above 15%.</a:t>
-            </a:r>
-            <a:endParaRPr lang="en-US" sz="1050" dirty="0"/>
+              <a:t>No raise means no buffer for a bad quarter. Mitigation: stay cash-positive from house #1; never spend ahead of surplus.</a:t>
+            </a:r>
+            <a:endParaRPr lang="en-US" sz="1000" dirty="0"/>
           </a:p>
         </p:txBody>
       </p:sp>
@@ -10088,7 +9886,7 @@
               <a:buNone/>
             </a:pPr>
             <a:r>
-              <a:rPr lang="en-US" sz="1500" b="1" dirty="0">
+              <a:rPr lang="en-US" sz="1450" b="1" dirty="0">
                 <a:solidFill>
                   <a:srgbClr val="2D1B1A"/>
                 </a:solidFill>
@@ -10096,9 +9894,9 @@
                 <a:ea typeface="Georgia" pitchFamily="34" charset="-122"/>
                 <a:cs typeface="Georgia" pitchFamily="34" charset="-120"/>
               </a:rPr>
-              <a:t>Lean founder cost</a:t>
-            </a:r>
-            <a:endParaRPr lang="en-US" sz="1500" dirty="0"/>
+              <a:t>Operator-capacity ceiling</a:t>
+            </a:r>
+            <a:endParaRPr lang="en-US" sz="1450" dirty="0"/>
           </a:p>
         </p:txBody>
       </p:sp>
@@ -10127,7 +9925,7 @@
               <a:buNone/>
             </a:pPr>
             <a:r>
-              <a:rPr lang="en-US" sz="1050" dirty="0">
+              <a:rPr lang="en-US" sz="1000" dirty="0">
                 <a:solidFill>
                   <a:srgbClr val="7A4F47"/>
                 </a:solidFill>
@@ -10135,9 +9933,9 @@
                 <a:ea typeface="Calibri" pitchFamily="34" charset="-122"/>
                 <a:cs typeface="Calibri" pitchFamily="34" charset="-120"/>
               </a:rPr>
-              <a:t>Founder draw is the largest fixed line. Equity-over-salary in the early years pulls break-even forward by quarters.</a:t>
-            </a:r>
-            <a:endParaRPr lang="en-US" sz="1050" dirty="0"/>
+              <a:t>One owner can only run so many houses. Mitigation: reinvest surplus into part-time help before signing the house that would overload us.</a:t>
+            </a:r>
+            <a:endParaRPr lang="en-US" sz="1000" dirty="0"/>
           </a:p>
         </p:txBody>
       </p:sp>

--- a/deliverables/business/financial-deck.pptx
+++ b/deliverables/business/financial-deck.pptx
@@ -176,9 +176,9 @@
           </c:dLbls>
           <c:cat>
             <c:multiLvlStrRef>
-              <c:f>Sheet1!$A$2:$A$4</c:f>
+              <c:f>Sheet1!$A$2:$A$6</c:f>
               <c:multiLvlStrCache>
-                <c:ptCount val="3"/>
+                <c:ptCount val="5"/>
                 <c:lvl>
                   <c:pt idx="0">
                     <c:v>Year 1</c:v>
@@ -189,24 +189,36 @@
                   <c:pt idx="2">
                     <c:v>Year 3</c:v>
                   </c:pt>
+                  <c:pt idx="3">
+                    <c:v>Year 4</c:v>
+                  </c:pt>
+                  <c:pt idx="4">
+                    <c:v>Year 5</c:v>
+                  </c:pt>
                 </c:lvl>
               </c:multiLvlStrCache>
             </c:multiLvlStrRef>
           </c:cat>
           <c:val>
             <c:numRef>
-              <c:f>Sheet1!$B$2:$B$4</c:f>
+              <c:f>Sheet1!$B$2:$B$6</c:f>
               <c:numCache>
                 <c:formatCode>General</c:formatCode>
-                <c:ptCount val="3"/>
+                <c:ptCount val="5"/>
                 <c:pt idx="0">
-                  <c:v>12321</c:v>
+                  <c:v>61636</c:v>
                 </c:pt>
                 <c:pt idx="1">
-                  <c:v>28071</c:v>
+                  <c:v>130867</c:v>
                 </c:pt>
                 <c:pt idx="2">
-                  <c:v>48987</c:v>
+                  <c:v>198346</c:v>
+                </c:pt>
+                <c:pt idx="3">
+                  <c:v>277259</c:v>
+                </c:pt>
+                <c:pt idx="4">
+                  <c:v>361695</c:v>
                 </c:pt>
               </c:numCache>
             </c:numRef>
@@ -259,9 +271,9 @@
           </c:dLbls>
           <c:cat>
             <c:multiLvlStrRef>
-              <c:f>Sheet1!$A$2:$A$4</c:f>
+              <c:f>Sheet1!$A$2:$A$6</c:f>
               <c:multiLvlStrCache>
-                <c:ptCount val="3"/>
+                <c:ptCount val="5"/>
                 <c:lvl>
                   <c:pt idx="0">
                     <c:v>Year 1</c:v>
@@ -272,24 +284,36 @@
                   <c:pt idx="2">
                     <c:v>Year 3</c:v>
                   </c:pt>
+                  <c:pt idx="3">
+                    <c:v>Year 4</c:v>
+                  </c:pt>
+                  <c:pt idx="4">
+                    <c:v>Year 5</c:v>
+                  </c:pt>
                 </c:lvl>
               </c:multiLvlStrCache>
             </c:multiLvlStrRef>
           </c:cat>
           <c:val>
             <c:numRef>
-              <c:f>Sheet1!$C$2:$C$4</c:f>
+              <c:f>Sheet1!$C$2:$C$6</c:f>
               <c:numCache>
                 <c:formatCode>General</c:formatCode>
-                <c:ptCount val="3"/>
+                <c:ptCount val="5"/>
                 <c:pt idx="0">
-                  <c:v>6240</c:v>
+                  <c:v>48841</c:v>
                 </c:pt>
                 <c:pt idx="1">
-                  <c:v>10480</c:v>
+                  <c:v>84274</c:v>
                 </c:pt>
                 <c:pt idx="2">
-                  <c:v>16720</c:v>
+                  <c:v>132810</c:v>
+                </c:pt>
+                <c:pt idx="3">
+                  <c:v>181365</c:v>
+                </c:pt>
+                <c:pt idx="4">
+                  <c:v>235930</c:v>
                 </c:pt>
               </c:numCache>
             </c:numRef>
@@ -304,7 +328,7 @@
               <c:strCache>
                 <c:ptCount val="1"/>
                 <c:pt idx="0">
-                  <c:v>Founder income (surplus)</c:v>
+                  <c:v>Operating surplus</c:v>
                 </c:pt>
               </c:strCache>
             </c:strRef>
@@ -342,9 +366,9 @@
           </c:dLbls>
           <c:cat>
             <c:multiLvlStrRef>
-              <c:f>Sheet1!$A$2:$A$4</c:f>
+              <c:f>Sheet1!$A$2:$A$6</c:f>
               <c:multiLvlStrCache>
-                <c:ptCount val="3"/>
+                <c:ptCount val="5"/>
                 <c:lvl>
                   <c:pt idx="0">
                     <c:v>Year 1</c:v>
@@ -355,24 +379,36 @@
                   <c:pt idx="2">
                     <c:v>Year 3</c:v>
                   </c:pt>
+                  <c:pt idx="3">
+                    <c:v>Year 4</c:v>
+                  </c:pt>
+                  <c:pt idx="4">
+                    <c:v>Year 5</c:v>
+                  </c:pt>
                 </c:lvl>
               </c:multiLvlStrCache>
             </c:multiLvlStrRef>
           </c:cat>
           <c:val>
             <c:numRef>
-              <c:f>Sheet1!$D$2:$D$4</c:f>
+              <c:f>Sheet1!$D$2:$D$6</c:f>
               <c:numCache>
                 <c:formatCode>General</c:formatCode>
-                <c:ptCount val="3"/>
+                <c:ptCount val="5"/>
                 <c:pt idx="0">
-                  <c:v>6081</c:v>
+                  <c:v>12795</c:v>
                 </c:pt>
                 <c:pt idx="1">
-                  <c:v>17591</c:v>
+                  <c:v>46593</c:v>
                 </c:pt>
                 <c:pt idx="2">
-                  <c:v>32267</c:v>
+                  <c:v>65536</c:v>
+                </c:pt>
+                <c:pt idx="3">
+                  <c:v>95894</c:v>
+                </c:pt>
+                <c:pt idx="4">
+                  <c:v>125765</c:v>
                 </c:pt>
               </c:numCache>
             </c:numRef>
@@ -433,7 +469,7 @@
           <a:lstStyle/>
           <a:p>
             <a:pPr>
-              <a:defRPr sz="1000" b="0" i="0" u="none" strike="noStrike">
+              <a:defRPr sz="900" b="0" i="0" u="none" strike="noStrike">
                 <a:solidFill>
                   <a:srgbClr val="2D1B1A"/>
                 </a:solidFill>
@@ -555,7 +591,7 @@
               <c:strCache>
                 <c:ptCount val="1"/>
                 <c:pt idx="0">
-                  <c:v>Retainer</c:v>
+                  <c:v>Subscription</c:v>
                 </c:pt>
               </c:strCache>
             </c:strRef>
@@ -598,7 +634,7 @@
                 <c:ptCount val="1"/>
                 <c:lvl>
                   <c:pt idx="0">
-                    <c:v>Year 3</c:v>
+                    <c:v>Year 5</c:v>
                   </c:pt>
                 </c:lvl>
               </c:multiLvlStrCache>
@@ -611,7 +647,7 @@
                 <c:formatCode>General</c:formatCode>
                 <c:ptCount val="1"/>
                 <c:pt idx="0">
-                  <c:v>36900</c:v>
+                  <c:v>266400</c:v>
                 </c:pt>
               </c:numCache>
             </c:numRef>
@@ -626,7 +662,7 @@
               <c:strCache>
                 <c:ptCount val="1"/>
                 <c:pt idx="0">
-                  <c:v>Engagement</c:v>
+                  <c:v>GMV take</c:v>
                 </c:pt>
               </c:strCache>
             </c:strRef>
@@ -669,7 +705,7 @@
                 <c:ptCount val="1"/>
                 <c:lvl>
                   <c:pt idx="0">
-                    <c:v>Year 3</c:v>
+                    <c:v>Year 5</c:v>
                   </c:pt>
                 </c:lvl>
               </c:multiLvlStrCache>
@@ -682,7 +718,7 @@
                 <c:formatCode>General</c:formatCode>
                 <c:ptCount val="1"/>
                 <c:pt idx="0">
-                  <c:v>8000</c:v>
+                  <c:v>53618</c:v>
                 </c:pt>
               </c:numCache>
             </c:numRef>
@@ -697,7 +733,78 @@
               <c:strCache>
                 <c:ptCount val="1"/>
                 <c:pt idx="0">
-                  <c:v>Tx surcharge</c:v>
+                  <c:v>Transport</c:v>
+                </c:pt>
+              </c:strCache>
+            </c:strRef>
+          </c:tx>
+          <c:spPr>
+            <a:solidFill>
+              <a:srgbClr val="5A7D5A"/>
+            </a:solidFill>
+            <a:effectLst/>
+          </c:spPr>
+          <c:invertIfNegative val="0"/>
+          <c:dLbls>
+            <c:numFmt formatCode="#,##0" sourceLinked="0"/>
+            <c:txPr>
+              <a:bodyPr/>
+              <a:lstStyle/>
+              <a:p>
+                <a:pPr>
+                  <a:defRPr b="0" i="0" strike="noStrike" sz="1200" u="none">
+                    <a:solidFill>
+                      <a:srgbClr val="000000"/>
+                    </a:solidFill>
+                    <a:latin typeface="Arial"/>
+                  </a:defRPr>
+                </a:pPr>
+              </a:p>
+            </c:txPr>
+            <c:showLegendKey val="0"/>
+            <c:showVal val="0"/>
+            <c:showCatName val="0"/>
+            <c:showSerName val="0"/>
+            <c:showPercent val="0"/>
+            <c:showBubbleSize val="0"/>
+            <c:showLeaderLines val="0"/>
+          </c:dLbls>
+          <c:cat>
+            <c:multiLvlStrRef>
+              <c:f>Sheet1!$A$2:$A$2</c:f>
+              <c:multiLvlStrCache>
+                <c:ptCount val="1"/>
+                <c:lvl>
+                  <c:pt idx="0">
+                    <c:v>Year 5</c:v>
+                  </c:pt>
+                </c:lvl>
+              </c:multiLvlStrCache>
+            </c:multiLvlStrRef>
+          </c:cat>
+          <c:val>
+            <c:numRef>
+              <c:f>Sheet1!$D$2:$D$2</c:f>
+              <c:numCache>
+                <c:formatCode>General</c:formatCode>
+                <c:ptCount val="1"/>
+                <c:pt idx="0">
+                  <c:v>31677</c:v>
+                </c:pt>
+              </c:numCache>
+            </c:numRef>
+          </c:val>
+        </c:ser>
+        <c:ser>
+          <c:idx val="3"/>
+          <c:order val="3"/>
+          <c:tx>
+            <c:strRef>
+              <c:f>Sheet1!$E$1</c:f>
+              <c:strCache>
+                <c:ptCount val="1"/>
+                <c:pt idx="0">
+                  <c:v>Onboarding</c:v>
                 </c:pt>
               </c:strCache>
             </c:strRef>
@@ -740,7 +847,7 @@
                 <c:ptCount val="1"/>
                 <c:lvl>
                   <c:pt idx="0">
-                    <c:v>Year 3</c:v>
+                    <c:v>Year 5</c:v>
                   </c:pt>
                 </c:lvl>
               </c:multiLvlStrCache>
@@ -748,12 +855,12 @@
           </c:cat>
           <c:val>
             <c:numRef>
-              <c:f>Sheet1!$D$2:$D$2</c:f>
+              <c:f>Sheet1!$E$2:$E$2</c:f>
               <c:numCache>
                 <c:formatCode>General</c:formatCode>
                 <c:ptCount val="1"/>
                 <c:pt idx="0">
-                  <c:v>4087</c:v>
+                  <c:v>10000</c:v>
                 </c:pt>
               </c:numCache>
             </c:numRef>
@@ -936,7 +1043,7 @@
               <c:strCache>
                 <c:ptCount val="1"/>
                 <c:pt idx="0">
-                  <c:v>Founder income</c:v>
+                  <c:v>Operating surplus</c:v>
                 </c:pt>
               </c:strCache>
             </c:strRef>
@@ -974,9 +1081,9 @@
           </c:dLbls>
           <c:cat>
             <c:multiLvlStrRef>
-              <c:f>Sheet1!$A$2:$A$4</c:f>
+              <c:f>Sheet1!$A$2:$A$6</c:f>
               <c:multiLvlStrCache>
-                <c:ptCount val="3"/>
+                <c:ptCount val="5"/>
                 <c:lvl>
                   <c:pt idx="0">
                     <c:v>Year 1</c:v>
@@ -987,24 +1094,36 @@
                   <c:pt idx="2">
                     <c:v>Year 3</c:v>
                   </c:pt>
+                  <c:pt idx="3">
+                    <c:v>Year 4</c:v>
+                  </c:pt>
+                  <c:pt idx="4">
+                    <c:v>Year 5</c:v>
+                  </c:pt>
                 </c:lvl>
               </c:multiLvlStrCache>
             </c:multiLvlStrRef>
           </c:cat>
           <c:val>
             <c:numRef>
-              <c:f>Sheet1!$B$2:$B$4</c:f>
+              <c:f>Sheet1!$B$2:$B$6</c:f>
               <c:numCache>
                 <c:formatCode>General</c:formatCode>
-                <c:ptCount val="3"/>
+                <c:ptCount val="5"/>
                 <c:pt idx="0">
-                  <c:v>6081</c:v>
+                  <c:v>12795</c:v>
                 </c:pt>
                 <c:pt idx="1">
-                  <c:v>17591</c:v>
+                  <c:v>46593</c:v>
                 </c:pt>
                 <c:pt idx="2">
-                  <c:v>32267</c:v>
+                  <c:v>65536</c:v>
+                </c:pt>
+                <c:pt idx="3">
+                  <c:v>95894</c:v>
+                </c:pt>
+                <c:pt idx="4">
+                  <c:v>125765</c:v>
                 </c:pt>
               </c:numCache>
             </c:numRef>
@@ -1065,7 +1184,7 @@
           <a:lstStyle/>
           <a:p>
             <a:pPr>
-              <a:defRPr sz="1100" b="0" i="0" u="none" strike="noStrike">
+              <a:defRPr sz="1000" b="0" i="0" u="none" strike="noStrike">
                 <a:solidFill>
                   <a:srgbClr val="2D1B1A"/>
                 </a:solidFill>
@@ -2927,7 +3046,7 @@
                 <a:ea typeface="Georgia" pitchFamily="34" charset="-122"/>
                 <a:cs typeface="Georgia" pitchFamily="34" charset="-120"/>
               </a:rPr>
-              <a:t>A financial overview for a bootstrapped business prying open a legacy,</a:t>
+              <a:t>A financial overview for a scaling B2B-SaaS platform prying open a legacy,</a:t>
             </a:r>
             <a:endParaRPr lang="en-US" sz="1900" dirty="0"/>
           </a:p>
@@ -2983,7 +3102,7 @@
                 <a:ea typeface="Calibri" pitchFamily="34" charset="-122"/>
                 <a:cs typeface="Calibri" pitchFamily="34" charset="-120"/>
               </a:rPr>
-              <a:t>Owner-operated. No funding round. No founder salary. Cash-financed from day one.  </a:t>
+              <a:t>Auction houses onboard as tenants. Largely self-funded, with a working-capital buffer — not a raise.  </a:t>
             </a:r>
             <a:pPr indent="0" marL="0">
               <a:buNone/>
@@ -3576,7 +3695,7 @@
           <a:p>
             <a:pPr indent="0" marL="0">
               <a:lnSpc>
-                <a:spcPct val="115000"/>
+                <a:spcPct val="112000"/>
               </a:lnSpc>
               <a:spcAft>
                 <a:spcPts val="400"/>
@@ -3584,7 +3703,7 @@
               <a:buNone/>
             </a:pPr>
             <a:r>
-              <a:rPr lang="en-US" sz="1700" dirty="0">
+              <a:rPr lang="en-US" sz="1600" dirty="0">
                 <a:solidFill>
                   <a:srgbClr val="F5E6D3"/>
                 </a:solidFill>
@@ -3592,11 +3711,11 @@
                 <a:ea typeface="Georgia" pitchFamily="34" charset="-122"/>
                 <a:cs typeface="Georgia" pitchFamily="34" charset="-120"/>
               </a:rPr>
-              <a:t>This is a bootstrap, not a startup with a runway.  </a:t>
+              <a:t>This is a scaling B2B-SaaS platform, self-funded behind a working-capital buffer — not a startup with a raised runway.  </a:t>
             </a:r>
             <a:pPr indent="0" marL="0">
               <a:lnSpc>
-                <a:spcPct val="115000"/>
+                <a:spcPct val="112000"/>
               </a:lnSpc>
               <a:spcAft>
                 <a:spcPts val="400"/>
@@ -3604,7 +3723,7 @@
               <a:buNone/>
             </a:pPr>
             <a:r>
-              <a:rPr lang="en-US" sz="1700" dirty="0">
+              <a:rPr lang="en-US" sz="1600" dirty="0">
                 <a:solidFill>
                   <a:srgbClr val="F5E6D3"/>
                 </a:solidFill>
@@ -3612,11 +3731,11 @@
                 <a:ea typeface="Georgia" pitchFamily="34" charset="-122"/>
                 <a:cs typeface="Georgia" pitchFamily="34" charset="-120"/>
               </a:rPr>
-              <a:t>There is no capital to raise in this market, so the business is built to be cash-positive from the first house — </a:t>
+              <a:t>There is no capital to raise in this market, so the platform is built to be surplus-positive early as houses onboard as tenants — </a:t>
             </a:r>
             <a:pPr indent="0" marL="0">
               <a:lnSpc>
-                <a:spcPct val="115000"/>
+                <a:spcPct val="112000"/>
               </a:lnSpc>
               <a:spcAft>
                 <a:spcPts val="400"/>
@@ -3624,7 +3743,7 @@
               <a:buNone/>
             </a:pPr>
             <a:r>
-              <a:rPr lang="en-US" sz="1700" b="1" dirty="0">
+              <a:rPr lang="en-US" sz="1600" b="1" dirty="0">
                 <a:solidFill>
                   <a:srgbClr val="D4A843"/>
                 </a:solidFill>
@@ -3632,11 +3751,11 @@
                 <a:ea typeface="Georgia" pitchFamily="34" charset="-122"/>
                 <a:cs typeface="Georgia" pitchFamily="34" charset="-120"/>
               </a:rPr>
-              <a:t>founder income of US$6,081 → US$32,267 across three years, on US$0 of outside money, </a:t>
+              <a:t>operating surplus of US$12,795 → US$125,765 across five years (cumulative US$346,583), on US$0 of outside equity.  </a:t>
             </a:r>
             <a:pPr indent="0" marL="0">
               <a:lnSpc>
-                <a:spcPct val="115000"/>
+                <a:spcPct val="112000"/>
               </a:lnSpc>
               <a:spcAft>
                 <a:spcPts val="400"/>
@@ -3644,7 +3763,7 @@
               <a:buNone/>
             </a:pPr>
             <a:r>
-              <a:rPr lang="en-US" sz="1700" dirty="0">
+              <a:rPr lang="en-US" sz="1600" dirty="0">
                 <a:solidFill>
                   <a:srgbClr val="F5E6D3"/>
                 </a:solidFill>
@@ -3652,11 +3771,11 @@
                 <a:ea typeface="Georgia" pitchFamily="34" charset="-122"/>
                 <a:cs typeface="Georgia" pitchFamily="34" charset="-120"/>
               </a:rPr>
-              <a:t>and never more than US$2,250 out of pocket.  The per-house economics work; growth is paid for from surplus; the ceiling is people, not cash.  </a:t>
+              <a:t>The per-house economics work; growth rides on house count and transport, paid for from surplus; B2B today, B2B2C tomorrow.  </a:t>
             </a:r>
             <a:pPr indent="0" marL="0">
               <a:lnSpc>
-                <a:spcPct val="115000"/>
+                <a:spcPct val="112000"/>
               </a:lnSpc>
               <a:spcAft>
                 <a:spcPts val="400"/>
@@ -3664,7 +3783,7 @@
               <a:buNone/>
             </a:pPr>
             <a:r>
-              <a:rPr lang="en-US" sz="1700" b="1" dirty="0">
+              <a:rPr lang="en-US" sz="1600" b="1" dirty="0">
                 <a:solidFill>
                   <a:srgbClr val="D4A843"/>
                 </a:solidFill>
@@ -3672,9 +3791,9 @@
                 <a:ea typeface="Georgia" pitchFamily="34" charset="-122"/>
                 <a:cs typeface="Georgia" pitchFamily="34" charset="-120"/>
               </a:rPr>
-              <a:t>And along the way it routes over US$800k onto Paynow's rails.</a:t>
-            </a:r>
-            <a:endParaRPr lang="en-US" sz="1700" dirty="0"/>
+              <a:t>And along the way it routes over US$19.5M onto Paynow's rails.</a:t>
+            </a:r>
+            <a:endParaRPr lang="en-US" sz="1600" dirty="0"/>
           </a:p>
         </p:txBody>
       </p:sp>
@@ -3894,7 +4013,7 @@
                 <a:ea typeface="Georgia" pitchFamily="34" charset="-122"/>
                 <a:cs typeface="Georgia" pitchFamily="34" charset="-120"/>
               </a:rPr>
-              <a:t>Three revenue lines. The retainer is the spine.</a:t>
+              <a:t>Four revenue lines. The subscription is the spine.</a:t>
             </a:r>
             <a:endParaRPr lang="en-US" sz="3100" dirty="0"/>
           </a:p>
@@ -3933,7 +4052,7 @@
                 <a:ea typeface="Calibri" pitchFamily="34" charset="-122"/>
                 <a:cs typeface="Calibri" pitchFamily="34" charset="-120"/>
               </a:rPr>
-              <a:t>Software-as-a-professional-service, not SaaS. Pricing set to realistic Zimbabwean willingness-to-pay in USD.</a:t>
+              <a:t>A B2B SaaS platform — auction houses onboard as isolated tenants. Pricing set to realistic Zimbabwean willingness-to-pay in USD.</a:t>
             </a:r>
             <a:endParaRPr lang="en-US" sz="1300" dirty="0"/>
           </a:p>
@@ -4012,7 +4131,7 @@
                 <a:ea typeface="Calibri" pitchFamily="34" charset="-122"/>
                 <a:cs typeface="Calibri" pitchFamily="34" charset="-120"/>
               </a:rPr>
-              <a:t>ENGAGEMENT</a:t>
+              <a:t>ONBOARDING</a:t>
             </a:r>
             <a:endParaRPr lang="en-US" sz="1000" dirty="0"/>
           </a:p>
@@ -4043,7 +4162,7 @@
               <a:buNone/>
             </a:pPr>
             <a:r>
-              <a:rPr lang="en-US" sz="2500" b="1" dirty="0">
+              <a:rPr lang="en-US" sz="2200" b="1" dirty="0">
                 <a:solidFill>
                   <a:srgbClr val="F5E6D3"/>
                 </a:solidFill>
@@ -4051,9 +4170,9 @@
                 <a:ea typeface="Georgia" pitchFamily="34" charset="-122"/>
                 <a:cs typeface="Georgia" pitchFamily="34" charset="-120"/>
               </a:rPr>
-              <a:t>US$5–8k</a:t>
-            </a:r>
-            <a:endParaRPr lang="en-US" sz="2500" dirty="0"/>
+              <a:t>US$1.5–3.5k</a:t>
+            </a:r>
+            <a:endParaRPr lang="en-US" sz="2200" dirty="0"/>
           </a:p>
         </p:txBody>
       </p:sp>
@@ -4129,7 +4248,7 @@
                 <a:ea typeface="Calibri" pitchFamily="34" charset="-122"/>
                 <a:cs typeface="Calibri" pitchFamily="34" charset="-120"/>
               </a:rPr>
-              <a:t>Discovery, branded skin, data migration, Paynow integration, on-floor training day.</a:t>
+              <a:t>Branded tenant, data migration, Paynow integration, on-floor training. Self-serve wizard keeps it low-touch.</a:t>
             </a:r>
             <a:endParaRPr lang="en-US" sz="1100" dirty="0"/>
           </a:p>
@@ -4208,7 +4327,7 @@
                 <a:ea typeface="Calibri" pitchFamily="34" charset="-122"/>
                 <a:cs typeface="Calibri" pitchFamily="34" charset="-120"/>
               </a:rPr>
-              <a:t>RETAINER</a:t>
+              <a:t>SUBSCRIPTION</a:t>
             </a:r>
             <a:endParaRPr lang="en-US" sz="1000" dirty="0"/>
           </a:p>
@@ -4239,7 +4358,7 @@
               <a:buNone/>
             </a:pPr>
             <a:r>
-              <a:rPr lang="en-US" sz="2500" b="1" dirty="0">
+              <a:rPr lang="en-US" sz="2200" b="1" dirty="0">
                 <a:solidFill>
                   <a:srgbClr val="F5E6D3"/>
                 </a:solidFill>
@@ -4247,9 +4366,9 @@
                 <a:ea typeface="Georgia" pitchFamily="34" charset="-122"/>
                 <a:cs typeface="Georgia" pitchFamily="34" charset="-120"/>
               </a:rPr>
-              <a:t>US$1.0–1.5k</a:t>
-            </a:r>
-            <a:endParaRPr lang="en-US" sz="2500" dirty="0"/>
+              <a:t>US$0.9–1.5k</a:t>
+            </a:r>
+            <a:endParaRPr lang="en-US" sz="2200" dirty="0"/>
           </a:p>
         </p:txBody>
       </p:sp>
@@ -4325,7 +4444,7 @@
                 <a:ea typeface="Calibri" pitchFamily="34" charset="-122"/>
                 <a:cs typeface="Calibri" pitchFamily="34" charset="-120"/>
               </a:rPr>
-              <a:t>We operate the platform on their behalf. The reliable, contractual spine.</a:t>
+              <a:t>The platform, run for them across five channels. The reliable, contractual spine.</a:t>
             </a:r>
             <a:endParaRPr lang="en-US" sz="1100" dirty="0"/>
           </a:p>
@@ -4404,7 +4523,7 @@
                 <a:ea typeface="Calibri" pitchFamily="34" charset="-122"/>
                 <a:cs typeface="Calibri" pitchFamily="34" charset="-120"/>
               </a:rPr>
-              <a:t>TX SURCHARGE</a:t>
+              <a:t>TAKE + TRANSPORT</a:t>
             </a:r>
             <a:endParaRPr lang="en-US" sz="1000" dirty="0"/>
           </a:p>
@@ -4435,7 +4554,7 @@
               <a:buNone/>
             </a:pPr>
             <a:r>
-              <a:rPr lang="en-US" sz="2500" b="1" dirty="0">
+              <a:rPr lang="en-US" sz="2200" b="1" dirty="0">
                 <a:solidFill>
                   <a:srgbClr val="F5E6D3"/>
                 </a:solidFill>
@@ -4443,9 +4562,9 @@
                 <a:ea typeface="Georgia" pitchFamily="34" charset="-122"/>
                 <a:cs typeface="Georgia" pitchFamily="34" charset="-120"/>
               </a:rPr>
-              <a:t>0.75%</a:t>
-            </a:r>
-            <a:endParaRPr lang="en-US" sz="2500" dirty="0"/>
+              <a:t>0.75% + US$15</a:t>
+            </a:r>
+            <a:endParaRPr lang="en-US" sz="2200" dirty="0"/>
           </a:p>
         </p:txBody>
       </p:sp>
@@ -4482,7 +4601,7 @@
                 <a:ea typeface="Calibri" pitchFamily="34" charset="-122"/>
                 <a:cs typeface="Calibri" pitchFamily="34" charset="-120"/>
               </a:rPr>
-              <a:t>of settled GMV</a:t>
+              <a:t>GMV take · delivery booking</a:t>
             </a:r>
             <a:endParaRPr lang="en-US" sz="1100" dirty="0"/>
           </a:p>
@@ -4521,7 +4640,7 @@
                 <a:ea typeface="Calibri" pitchFamily="34" charset="-122"/>
                 <a:cs typeface="Calibri" pitchFamily="34" charset="-120"/>
               </a:rPr>
-              <a:t>Small but compounds with adoption. Sits on top of Paynow's own fee.</a:t>
+              <a:t>A thin take on settled GMV (atop Paynow's fee) plus the B2B2C transport booking leg — both compound.</a:t>
             </a:r>
             <a:endParaRPr lang="en-US" sz="1100" dirty="0"/>
           </a:p>
@@ -4552,7 +4671,7 @@
               <a:buNone/>
             </a:pPr>
             <a:r>
-              <a:rPr lang="en-US" sz="1050" b="1" i="1" dirty="0">
+              <a:rPr lang="en-US" sz="1000" b="1" i="1" dirty="0">
                 <a:solidFill>
                   <a:srgbClr val="2D1B1A"/>
                 </a:solidFill>
@@ -4566,7 +4685,7 @@
               <a:buNone/>
             </a:pPr>
             <a:r>
-              <a:rPr lang="en-US" sz="1050" i="1" dirty="0">
+              <a:rPr lang="en-US" sz="1000" i="1" dirty="0">
                 <a:solidFill>
                   <a:srgbClr val="7A4F47"/>
                 </a:solidFill>
@@ -4574,9 +4693,9 @@
                 <a:ea typeface="Calibri" pitchFamily="34" charset="-122"/>
                 <a:cs typeface="Calibri" pitchFamily="34" charset="-120"/>
               </a:rPr>
-              <a:t>Pilot US$5k + US$1,000/mo  ·  Tier B US$6k + US$1,200/mo  ·  Tier A US$8k + US$1,500/mo  ·  all + 0.75% surcharge</a:t>
-            </a:r>
-            <a:endParaRPr lang="en-US" sz="1050" dirty="0"/>
+              <a:t>Pilot US$1k + US$1,000/mo  ·  Tier C US$1.5k + US$900/mo  ·  Tier B US$2.5k + US$1,200/mo  ·  Tier A US$3.5k + US$1,500/mo  ·  all + 0.75% take</a:t>
+            </a:r>
+            <a:endParaRPr lang="en-US" sz="1000" dirty="0"/>
           </a:p>
         </p:txBody>
       </p:sp>
@@ -4782,7 +4901,7 @@
                 <a:ea typeface="Georgia" pitchFamily="34" charset="-122"/>
                 <a:cs typeface="Georgia" pitchFamily="34" charset="-120"/>
               </a:rPr>
-              <a:t>The per-house unit works — even at 15% adoption.</a:t>
+              <a:t>The per-house unit works — at field-honest adoption.</a:t>
             </a:r>
             <a:endParaRPr lang="en-US" sz="3100" dirty="0"/>
           </a:p>
@@ -4821,7 +4940,7 @@
                 <a:ea typeface="Calibri" pitchFamily="34" charset="-122"/>
                 <a:cs typeface="Calibri" pitchFamily="34" charset="-120"/>
               </a:rPr>
-              <a:t>A single mature auction house, at just 15% of its physical GMV settling digitally. Contribution comfortably exceeds the marginal cost to serve it.</a:t>
+              <a:t>A single mature auction house, at field-honest digital adoption (~13%) of its physical GMV. Recurring revenue comfortably exceeds the marginal cost to serve it.</a:t>
             </a:r>
             <a:endParaRPr lang="en-US" sz="1300" dirty="0"/>
           </a:p>
@@ -4888,7 +5007,7 @@
                 <a:ea typeface="Calibri" pitchFamily="34" charset="-122"/>
                 <a:cs typeface="Calibri" pitchFamily="34" charset="-120"/>
               </a:rPr>
-              <a:t>Engagement</a:t>
+              <a:t>Onboarding</a:t>
             </a:r>
             <a:endParaRPr lang="en-US" sz="1000" dirty="0"/>
           </a:p>
@@ -4944,7 +5063,7 @@
                 <a:ea typeface="Calibri" pitchFamily="34" charset="-122"/>
                 <a:cs typeface="Calibri" pitchFamily="34" charset="-120"/>
               </a:rPr>
-              <a:t>Retainer</a:t>
+              <a:t>Subscription</a:t>
             </a:r>
             <a:endParaRPr lang="en-US" sz="1000" dirty="0"/>
           </a:p>
@@ -5000,7 +5119,7 @@
                 <a:ea typeface="Calibri" pitchFamily="34" charset="-122"/>
                 <a:cs typeface="Calibri" pitchFamily="34" charset="-120"/>
               </a:rPr>
-              <a:t>Tx @15%</a:t>
+              <a:t>Take @13%</a:t>
             </a:r>
             <a:endParaRPr lang="en-US" sz="1000" dirty="0"/>
           </a:p>
@@ -5179,7 +5298,7 @@
                 <a:ea typeface="Georgia" pitchFamily="34" charset="-122"/>
                 <a:cs typeface="Georgia" pitchFamily="34" charset="-120"/>
               </a:rPr>
-              <a:t>US$8,000</a:t>
+              <a:t>US$3,500</a:t>
             </a:r>
             <a:endParaRPr lang="en-US" sz="1400" dirty="0"/>
           </a:p>
@@ -5257,7 +5376,7 @@
                 <a:ea typeface="Georgia" pitchFamily="34" charset="-122"/>
                 <a:cs typeface="Georgia" pitchFamily="34" charset="-120"/>
               </a:rPr>
-              <a:t>US$4,860</a:t>
+              <a:t>US$4,228</a:t>
             </a:r>
             <a:endParaRPr lang="en-US" sz="1400" dirty="0"/>
           </a:p>
@@ -5296,7 +5415,7 @@
                 <a:ea typeface="Georgia" pitchFamily="34" charset="-122"/>
                 <a:cs typeface="Georgia" pitchFamily="34" charset="-120"/>
               </a:rPr>
-              <a:t>US$22,860</a:t>
+              <a:t>US$22,228</a:t>
             </a:r>
             <a:endParaRPr lang="en-US" sz="1700" dirty="0"/>
           </a:p>
@@ -5413,7 +5532,7 @@
                 <a:ea typeface="Georgia" pitchFamily="34" charset="-122"/>
                 <a:cs typeface="Georgia" pitchFamily="34" charset="-120"/>
               </a:rPr>
-              <a:t>US$6,000</a:t>
+              <a:t>US$2,500</a:t>
             </a:r>
             <a:endParaRPr lang="en-US" sz="1400" dirty="0"/>
           </a:p>
@@ -5491,7 +5610,7 @@
                 <a:ea typeface="Georgia" pitchFamily="34" charset="-122"/>
                 <a:cs typeface="Georgia" pitchFamily="34" charset="-120"/>
               </a:rPr>
-              <a:t>US$2,430</a:t>
+              <a:t>US$2,114</a:t>
             </a:r>
             <a:endParaRPr lang="en-US" sz="1400" dirty="0"/>
           </a:p>
@@ -5530,7 +5649,7 @@
                 <a:ea typeface="Georgia" pitchFamily="34" charset="-122"/>
                 <a:cs typeface="Georgia" pitchFamily="34" charset="-120"/>
               </a:rPr>
-              <a:t>US$16,830</a:t>
+              <a:t>US$16,514</a:t>
             </a:r>
             <a:endParaRPr lang="en-US" sz="1700" dirty="0"/>
           </a:p>
@@ -5622,7 +5741,7 @@
                 <a:ea typeface="Calibri" pitchFamily="34" charset="-122"/>
                 <a:cs typeface="Calibri" pitchFamily="34" charset="-120"/>
               </a:rPr>
-              <a:t>the business is sound per-unit. There is no big fixed cost to amortize — the founder draws no salary — so each house's contribution is real income from the day it matures.</a:t>
+              <a:t>the business is sound per-unit. The onboarding wizard makes each new tenant low-touch, so a house's recurring revenue clears its cost to serve from the day it goes live.</a:t>
             </a:r>
             <a:endParaRPr lang="en-US" sz="1150" dirty="0"/>
           </a:p>
@@ -5791,7 +5910,7 @@
                 <a:ea typeface="Calibri" pitchFamily="34" charset="-122"/>
                 <a:cs typeface="Calibri" pitchFamily="34" charset="-120"/>
               </a:rPr>
-              <a:t>THE BASE CASE — A BOOTSTRAP</a:t>
+              <a:t>THE BASE CASE — A SCALING PLATFORM</a:t>
             </a:r>
             <a:endParaRPr lang="en-US" sz="1100" dirty="0"/>
           </a:p>
@@ -5830,7 +5949,7 @@
                 <a:ea typeface="Georgia" pitchFamily="34" charset="-122"/>
                 <a:cs typeface="Georgia" pitchFamily="34" charset="-120"/>
               </a:rPr>
-              <a:t>Cash-positive from the first live house.</a:t>
+              <a:t>Surplus-positive from the first year.</a:t>
             </a:r>
             <a:endParaRPr lang="en-US" sz="3100" dirty="0"/>
           </a:p>
@@ -5869,7 +5988,7 @@
                 <a:ea typeface="Calibri" pitchFamily="34" charset="-122"/>
                 <a:cs typeface="Calibri" pitchFamily="34" charset="-120"/>
               </a:rPr>
-              <a:t>No external capital, no founder salary, no hire-ahead. The founder's income is the operating surplus. Three houses (1 → 2 → 3) over three years.</a:t>
+              <a:t>Largely self-funded with a 2–3 month working-capital buffer — not a raise. Twenty houses live (5 → 8 → 12 → 16 → 20) over five years; the founder draws a salary inside payroll.</a:t>
             </a:r>
             <a:endParaRPr lang="en-US" sz="1300" dirty="0"/>
           </a:p>
@@ -5963,7 +6082,7 @@
                 <a:ea typeface="Georgia" pitchFamily="34" charset="-122"/>
                 <a:cs typeface="Georgia" pitchFamily="34" charset="-120"/>
               </a:rPr>
-              <a:t>+US$6,081</a:t>
+              <a:t>+US$12,795</a:t>
             </a:r>
             <a:pPr indent="0" marL="0">
               <a:buNone/>
@@ -5974,7 +6093,7 @@
                   <a:srgbClr val="7A4F47"/>
                 </a:solidFill>
               </a:rPr>
-              <a:t>  income</a:t>
+              <a:t>  surplus</a:t>
             </a:r>
             <a:endParaRPr lang="en-US" sz="2000" dirty="0"/>
           </a:p>
@@ -6013,7 +6132,7 @@
                 <a:ea typeface="Calibri" pitchFamily="34" charset="-122"/>
                 <a:cs typeface="Calibri" pitchFamily="34" charset="-120"/>
               </a:rPr>
-              <a:t>1 house · rev US$12,321</a:t>
+              <a:t>5 houses live · rev US$61,636</a:t>
             </a:r>
             <a:endParaRPr lang="en-US" sz="950" dirty="0"/>
           </a:p>
@@ -6052,7 +6171,7 @@
                 <a:ea typeface="Calibri" pitchFamily="34" charset="-122"/>
                 <a:cs typeface="Calibri" pitchFamily="34" charset="-120"/>
               </a:rPr>
-              <a:t>YEAR 2</a:t>
+              <a:t>YEAR 3</a:t>
             </a:r>
             <a:endParaRPr lang="en-US" sz="900" dirty="0"/>
           </a:p>
@@ -6091,7 +6210,7 @@
                 <a:ea typeface="Georgia" pitchFamily="34" charset="-122"/>
                 <a:cs typeface="Georgia" pitchFamily="34" charset="-120"/>
               </a:rPr>
-              <a:t>+US$17,591</a:t>
+              <a:t>+US$65,536</a:t>
             </a:r>
             <a:pPr indent="0" marL="0">
               <a:buNone/>
@@ -6102,7 +6221,7 @@
                   <a:srgbClr val="7A4F47"/>
                 </a:solidFill>
               </a:rPr>
-              <a:t>  income</a:t>
+              <a:t>  surplus</a:t>
             </a:r>
             <a:endParaRPr lang="en-US" sz="2000" dirty="0"/>
           </a:p>
@@ -6141,7 +6260,7 @@
                 <a:ea typeface="Calibri" pitchFamily="34" charset="-122"/>
                 <a:cs typeface="Calibri" pitchFamily="34" charset="-120"/>
               </a:rPr>
-              <a:t>2 houses · rev US$28,071</a:t>
+              <a:t>12 houses live · rev US$198,346</a:t>
             </a:r>
             <a:endParaRPr lang="en-US" sz="950" dirty="0"/>
           </a:p>
@@ -6180,7 +6299,7 @@
                 <a:ea typeface="Calibri" pitchFamily="34" charset="-122"/>
                 <a:cs typeface="Calibri" pitchFamily="34" charset="-120"/>
               </a:rPr>
-              <a:t>YEAR 3</a:t>
+              <a:t>YEAR 5</a:t>
             </a:r>
             <a:endParaRPr lang="en-US" sz="900" dirty="0"/>
           </a:p>
@@ -6219,7 +6338,7 @@
                 <a:ea typeface="Georgia" pitchFamily="34" charset="-122"/>
                 <a:cs typeface="Georgia" pitchFamily="34" charset="-120"/>
               </a:rPr>
-              <a:t>+US$32,267</a:t>
+              <a:t>+US$125,765</a:t>
             </a:r>
             <a:pPr indent="0" marL="0">
               <a:buNone/>
@@ -6230,7 +6349,7 @@
                   <a:srgbClr val="7A4F47"/>
                 </a:solidFill>
               </a:rPr>
-              <a:t>  income</a:t>
+              <a:t>  surplus</a:t>
             </a:r>
             <a:endParaRPr lang="en-US" sz="2000" dirty="0"/>
           </a:p>
@@ -6269,7 +6388,7 @@
                 <a:ea typeface="Calibri" pitchFamily="34" charset="-122"/>
                 <a:cs typeface="Calibri" pitchFamily="34" charset="-120"/>
               </a:rPr>
-              <a:t>3 houses · rev US$48,987</a:t>
+              <a:t>20 houses live · rev US$361,695</a:t>
             </a:r>
             <a:endParaRPr lang="en-US" sz="950" dirty="0"/>
           </a:p>
@@ -6308,7 +6427,7 @@
                 <a:ea typeface="Calibri" pitchFamily="34" charset="-122"/>
                 <a:cs typeface="Calibri" pitchFamily="34" charset="-120"/>
               </a:rPr>
-              <a:t>External capital required: US$0.  </a:t>
+              <a:t>External equity required: US$0.  </a:t>
             </a:r>
             <a:pPr indent="0" marL="0">
               <a:buNone/>
@@ -6322,7 +6441,7 @@
                 <a:ea typeface="Calibri" pitchFamily="34" charset="-122"/>
                 <a:cs typeface="Calibri" pitchFamily="34" charset="-120"/>
               </a:rPr>
-              <a:t>The deepest the founder is ever out of pocket is US$2,250 (pre-launch months) — self-financed. Founder earns US$55,939 over 3 years.</a:t>
+              <a:t>Self-funded with a prudent 2–3 month opex buffer; the Year-1 cushion is thin (~3.5 weeks of opex). Cumulative surplus reaches US$346,583 over 5 years.</a:t>
             </a:r>
             <a:endParaRPr lang="en-US" sz="1050" dirty="0"/>
           </a:p>
@@ -6530,7 +6649,7 @@
                 <a:ea typeface="Georgia" pitchFamily="34" charset="-122"/>
                 <a:cs typeface="Georgia" pitchFamily="34" charset="-120"/>
               </a:rPr>
-              <a:t>It's an operator-capacity problem, not an adoption one.</a:t>
+              <a:t>Growth rides on house count and transport, not adoption.</a:t>
             </a:r>
             <a:endParaRPr lang="en-US" sz="3100" dirty="0"/>
           </a:p>
@@ -6569,7 +6688,7 @@
                 <a:ea typeface="Calibri" pitchFamily="34" charset="-122"/>
                 <a:cs typeface="Calibri" pitchFamily="34" charset="-120"/>
               </a:rPr>
-              <a:t>Chasing higher digital adoption barely moves income — the transaction surcharge is tiny. What grows the business is running more houses well.</a:t>
+              <a:t>Chasing higher digital adoption barely moves revenue — the GMV take is thin. What scales the platform is more houses onboarded and the consumer transport line ramping.</a:t>
             </a:r>
             <a:endParaRPr lang="en-US" sz="1300" dirty="0"/>
           </a:p>
@@ -6608,7 +6727,7 @@
                 <a:ea typeface="Calibri" pitchFamily="34" charset="-122"/>
                 <a:cs typeface="Calibri" pitchFamily="34" charset="-120"/>
               </a:rPr>
-              <a:t>PUSHING ADOPTION HARDER (3-house book, Y3 avg monthly surplus)</a:t>
+              <a:t>PUSHING ADOPTION HARDER (20-house book, Y5 GMV take)</a:t>
             </a:r>
             <a:endParaRPr lang="en-US" sz="1000" dirty="0"/>
           </a:p>
@@ -6647,7 +6766,7 @@
                 <a:ea typeface="Calibri" pitchFamily="34" charset="-122"/>
                 <a:cs typeface="Calibri" pitchFamily="34" charset="-120"/>
               </a:rPr>
-              <a:t>15% adoption</a:t>
+              <a:t>13.7% (base)</a:t>
             </a:r>
             <a:endParaRPr lang="en-US" sz="1200" dirty="0"/>
           </a:p>
@@ -6678,7 +6797,7 @@
               <a:buNone/>
             </a:pPr>
             <a:r>
-              <a:rPr lang="en-US" sz="1400" b="1" dirty="0">
+              <a:rPr lang="en-US" sz="1300" b="1" dirty="0">
                 <a:solidFill>
                   <a:srgbClr val="5A7D5A"/>
                 </a:solidFill>
@@ -6686,9 +6805,9 @@
                 <a:ea typeface="Georgia" pitchFamily="34" charset="-122"/>
                 <a:cs typeface="Georgia" pitchFamily="34" charset="-120"/>
               </a:rPr>
-              <a:t>+US$2,522/mo</a:t>
-            </a:r>
-            <a:endParaRPr lang="en-US" sz="1400" dirty="0"/>
+              <a:t>US$53,618/yr</a:t>
+            </a:r>
+            <a:endParaRPr lang="en-US" sz="1300" dirty="0"/>
           </a:p>
         </p:txBody>
       </p:sp>
@@ -6725,7 +6844,7 @@
                 <a:ea typeface="Calibri" pitchFamily="34" charset="-122"/>
                 <a:cs typeface="Calibri" pitchFamily="34" charset="-120"/>
               </a:rPr>
-              <a:t>20% adoption</a:t>
+              <a:t>18% adoption</a:t>
             </a:r>
             <a:endParaRPr lang="en-US" sz="1200" dirty="0"/>
           </a:p>
@@ -6756,7 +6875,7 @@
               <a:buNone/>
             </a:pPr>
             <a:r>
-              <a:rPr lang="en-US" sz="1400" b="1" dirty="0">
+              <a:rPr lang="en-US" sz="1300" b="1" dirty="0">
                 <a:solidFill>
                   <a:srgbClr val="5A7D5A"/>
                 </a:solidFill>
@@ -6764,9 +6883,9 @@
                 <a:ea typeface="Georgia" pitchFamily="34" charset="-122"/>
                 <a:cs typeface="Georgia" pitchFamily="34" charset="-120"/>
               </a:rPr>
-              <a:t>+US$2,590/mo</a:t>
-            </a:r>
-            <a:endParaRPr lang="en-US" sz="1400" dirty="0"/>
+              <a:t>US$70,000/yr</a:t>
+            </a:r>
+            <a:endParaRPr lang="en-US" sz="1300" dirty="0"/>
           </a:p>
         </p:txBody>
       </p:sp>
@@ -6803,7 +6922,7 @@
                 <a:ea typeface="Calibri" pitchFamily="34" charset="-122"/>
                 <a:cs typeface="Calibri" pitchFamily="34" charset="-120"/>
               </a:rPr>
-              <a:t>25% adoption</a:t>
+              <a:t>22% adoption</a:t>
             </a:r>
             <a:endParaRPr lang="en-US" sz="1200" dirty="0"/>
           </a:p>
@@ -6834,7 +6953,7 @@
               <a:buNone/>
             </a:pPr>
             <a:r>
-              <a:rPr lang="en-US" sz="1400" b="1" dirty="0">
+              <a:rPr lang="en-US" sz="1300" b="1" dirty="0">
                 <a:solidFill>
                   <a:srgbClr val="5A7D5A"/>
                 </a:solidFill>
@@ -6842,9 +6961,9 @@
                 <a:ea typeface="Georgia" pitchFamily="34" charset="-122"/>
                 <a:cs typeface="Georgia" pitchFamily="34" charset="-120"/>
               </a:rPr>
-              <a:t>+US$2,658/mo</a:t>
-            </a:r>
-            <a:endParaRPr lang="en-US" sz="1400" dirty="0"/>
+              <a:t>US$85,500/yr</a:t>
+            </a:r>
+            <a:endParaRPr lang="en-US" sz="1300" dirty="0"/>
           </a:p>
         </p:txBody>
       </p:sp>
@@ -6881,7 +7000,7 @@
                 <a:ea typeface="Calibri" pitchFamily="34" charset="-122"/>
                 <a:cs typeface="Calibri" pitchFamily="34" charset="-120"/>
               </a:rPr>
-              <a:t>30% adoption</a:t>
+              <a:t>26% adoption</a:t>
             </a:r>
             <a:endParaRPr lang="en-US" sz="1200" dirty="0"/>
           </a:p>
@@ -6912,7 +7031,7 @@
               <a:buNone/>
             </a:pPr>
             <a:r>
-              <a:rPr lang="en-US" sz="1400" b="1" dirty="0">
+              <a:rPr lang="en-US" sz="1300" b="1" dirty="0">
                 <a:solidFill>
                   <a:srgbClr val="5A7D5A"/>
                 </a:solidFill>
@@ -6920,9 +7039,9 @@
                 <a:ea typeface="Georgia" pitchFamily="34" charset="-122"/>
                 <a:cs typeface="Georgia" pitchFamily="34" charset="-120"/>
               </a:rPr>
-              <a:t>+US$2,724/mo</a:t>
-            </a:r>
-            <a:endParaRPr lang="en-US" sz="1400" dirty="0"/>
+              <a:t>US$101,000/yr</a:t>
+            </a:r>
+            <a:endParaRPr lang="en-US" sz="1300" dirty="0"/>
           </a:p>
         </p:txBody>
       </p:sp>
@@ -6959,7 +7078,7 @@
                 <a:ea typeface="Calibri" pitchFamily="34" charset="-122"/>
                 <a:cs typeface="Calibri" pitchFamily="34" charset="-120"/>
               </a:rPr>
-              <a:t>Doubling adoption recovers only ~US$200/mo. It is not the lever.</a:t>
+              <a:t>We hold adoption field-honest (~13.7%, below the ~15% mature ceiling) — it is not the lever.</a:t>
             </a:r>
             <a:endParaRPr lang="en-US" sz="1050" dirty="0"/>
           </a:p>
@@ -7038,7 +7157,7 @@
                 <a:ea typeface="Calibri" pitchFamily="34" charset="-122"/>
                 <a:cs typeface="Calibri" pitchFamily="34" charset="-120"/>
               </a:rPr>
-              <a:t>THE REAL LEVER</a:t>
+              <a:t>THE REAL LEVERS</a:t>
             </a:r>
             <a:endParaRPr lang="en-US" sz="1000" dirty="0"/>
           </a:p>
@@ -7077,7 +7196,7 @@
                 <a:ea typeface="Georgia" pitchFamily="34" charset="-122"/>
                 <a:cs typeface="Georgia" pitchFamily="34" charset="-120"/>
               </a:rPr>
-              <a:t>~US$15–21k</a:t>
+              <a:t>5 → 20 houses</a:t>
             </a:r>
             <a:pPr indent="0" marL="0">
               <a:buNone/>
@@ -7088,7 +7207,7 @@
                   <a:srgbClr val="BFAA98"/>
                 </a:solidFill>
               </a:rPr>
-              <a:t>  income per mature house / yr</a:t>
+              <a:t>  + transport attach 5% → 24%</a:t>
             </a:r>
             <a:endParaRPr lang="en-US" sz="2200" dirty="0"/>
           </a:p>
@@ -7119,7 +7238,7 @@
               <a:buNone/>
             </a:pPr>
             <a:r>
-              <a:rPr lang="en-US" sz="1150" dirty="0">
+              <a:rPr lang="en-US" sz="1100" dirty="0">
                 <a:solidFill>
                   <a:srgbClr val="D4A843"/>
                 </a:solidFill>
@@ -7127,9 +7246,9 @@
                 <a:ea typeface="Calibri" pitchFamily="34" charset="-122"/>
                 <a:cs typeface="Calibri" pitchFamily="34" charset="-120"/>
               </a:rPr>
-              <a:t>→  Grow by adding houses, each funded from the surplus of the last. No salary to cover, so every new house is income — until the ceiling, which is how many one owner + cheap part-time help can run well.</a:t>
-            </a:r>
-            <a:endParaRPr lang="en-US" sz="1150" dirty="0"/>
+              <a:t>→  A self-serve onboarding wizard makes adding tenants low-touch, so the platform scales on house count. The consumer transport line grows from US$826 to US$31,677/yr as the buyer base widens — diversifying B2B into B2B2C.</a:t>
+            </a:r>
+            <a:endParaRPr lang="en-US" sz="1100" dirty="0"/>
           </a:p>
         </p:txBody>
       </p:sp>
@@ -7335,7 +7454,7 @@
                 <a:ea typeface="Georgia" pitchFamily="34" charset="-122"/>
                 <a:cs typeface="Georgia" pitchFamily="34" charset="-120"/>
               </a:rPr>
-              <a:t>75% of revenue is contractual, not volume-dependent.</a:t>
+              <a:t>The bulk of revenue is contractual subscription.</a:t>
             </a:r>
             <a:endParaRPr lang="en-US" sz="3100" dirty="0"/>
           </a:p>
@@ -7374,7 +7493,7 @@
                 <a:ea typeface="Calibri" pitchFamily="34" charset="-122"/>
                 <a:cs typeface="Calibri" pitchFamily="34" charset="-120"/>
               </a:rPr>
-              <a:t>Because the retainer carries the model, slow digital adoption hurts the upside — not the survival. The transaction surcharge is the part that compounds as trust builds.</a:t>
+              <a:t>Because the subscription carries the model, slow digital adoption hurts the upside — not the survival. The GMV take and transport line are the parts that compound as trust builds and the consumer base widens.</a:t>
             </a:r>
             <a:endParaRPr lang="en-US" sz="1300" dirty="0"/>
           </a:p>
@@ -7404,7 +7523,7 @@
         </p:nvSpPr>
         <p:spPr>
           <a:xfrm>
-            <a:off x="5120640" y="2468880"/>
+            <a:off x="5120640" y="2395728"/>
             <a:ext cx="2377440" cy="320040"/>
           </a:xfrm>
           <a:prstGeom prst="rect">
@@ -7421,7 +7540,7 @@
               <a:buNone/>
             </a:pPr>
             <a:r>
-              <a:rPr lang="en-US" sz="1200" dirty="0">
+              <a:rPr lang="en-US" sz="1150" dirty="0">
                 <a:solidFill>
                   <a:srgbClr val="2D1B1A"/>
                 </a:solidFill>
@@ -7429,9 +7548,9 @@
                 <a:ea typeface="Calibri" pitchFamily="34" charset="-122"/>
                 <a:cs typeface="Calibri" pitchFamily="34" charset="-120"/>
               </a:rPr>
-              <a:t>Retainer (recurring spine)</a:t>
-            </a:r>
-            <a:endParaRPr lang="en-US" sz="1200" dirty="0"/>
+              <a:t>Subscription (recurring spine)</a:t>
+            </a:r>
+            <a:endParaRPr lang="en-US" sz="1150" dirty="0"/>
           </a:p>
         </p:txBody>
       </p:sp>
@@ -7443,7 +7562,7 @@
         </p:nvSpPr>
         <p:spPr>
           <a:xfrm>
-            <a:off x="7315200" y="2468880"/>
+            <a:off x="7315200" y="2395728"/>
             <a:ext cx="1234440" cy="320040"/>
           </a:xfrm>
           <a:prstGeom prst="rect">
@@ -7460,7 +7579,7 @@
               <a:buNone/>
             </a:pPr>
             <a:r>
-              <a:rPr lang="en-US" sz="1500" b="1" dirty="0">
+              <a:rPr lang="en-US" sz="1400" b="1" dirty="0">
                 <a:solidFill>
                   <a:srgbClr val="B85042"/>
                 </a:solidFill>
@@ -7468,9 +7587,9 @@
                 <a:ea typeface="Georgia" pitchFamily="34" charset="-122"/>
                 <a:cs typeface="Georgia" pitchFamily="34" charset="-120"/>
               </a:rPr>
-              <a:t>US$36,900</a:t>
-            </a:r>
-            <a:endParaRPr lang="en-US" sz="1500" dirty="0"/>
+              <a:t>US$266,400</a:t>
+            </a:r>
+            <a:endParaRPr lang="en-US" sz="1400" dirty="0"/>
           </a:p>
         </p:txBody>
       </p:sp>
@@ -7482,7 +7601,7 @@
         </p:nvSpPr>
         <p:spPr>
           <a:xfrm>
-            <a:off x="5120640" y="3035808"/>
+            <a:off x="5120640" y="2907792"/>
             <a:ext cx="2377440" cy="320040"/>
           </a:xfrm>
           <a:prstGeom prst="rect">
@@ -7499,7 +7618,7 @@
               <a:buNone/>
             </a:pPr>
             <a:r>
-              <a:rPr lang="en-US" sz="1200" dirty="0">
+              <a:rPr lang="en-US" sz="1150" dirty="0">
                 <a:solidFill>
                   <a:srgbClr val="2D1B1A"/>
                 </a:solidFill>
@@ -7507,9 +7626,9 @@
                 <a:ea typeface="Calibri" pitchFamily="34" charset="-122"/>
                 <a:cs typeface="Calibri" pitchFamily="34" charset="-120"/>
               </a:rPr>
-              <a:t>Engagement (one-off)</a:t>
-            </a:r>
-            <a:endParaRPr lang="en-US" sz="1200" dirty="0"/>
+              <a:t>GMV take (compounds)</a:t>
+            </a:r>
+            <a:endParaRPr lang="en-US" sz="1150" dirty="0"/>
           </a:p>
         </p:txBody>
       </p:sp>
@@ -7521,7 +7640,7 @@
         </p:nvSpPr>
         <p:spPr>
           <a:xfrm>
-            <a:off x="7315200" y="3035808"/>
+            <a:off x="7315200" y="2907792"/>
             <a:ext cx="1234440" cy="320040"/>
           </a:xfrm>
           <a:prstGeom prst="rect">
@@ -7538,7 +7657,7 @@
               <a:buNone/>
             </a:pPr>
             <a:r>
-              <a:rPr lang="en-US" sz="1500" b="1" dirty="0">
+              <a:rPr lang="en-US" sz="1400" b="1" dirty="0">
                 <a:solidFill>
                   <a:srgbClr val="B85042"/>
                 </a:solidFill>
@@ -7546,9 +7665,9 @@
                 <a:ea typeface="Georgia" pitchFamily="34" charset="-122"/>
                 <a:cs typeface="Georgia" pitchFamily="34" charset="-120"/>
               </a:rPr>
-              <a:t>US$8,000</a:t>
-            </a:r>
-            <a:endParaRPr lang="en-US" sz="1500" dirty="0"/>
+              <a:t>US$53,618</a:t>
+            </a:r>
+            <a:endParaRPr lang="en-US" sz="1400" dirty="0"/>
           </a:p>
         </p:txBody>
       </p:sp>
@@ -7560,7 +7679,7 @@
         </p:nvSpPr>
         <p:spPr>
           <a:xfrm>
-            <a:off x="5120640" y="3602736"/>
+            <a:off x="5120640" y="3419856"/>
             <a:ext cx="2377440" cy="320040"/>
           </a:xfrm>
           <a:prstGeom prst="rect">
@@ -7577,7 +7696,7 @@
               <a:buNone/>
             </a:pPr>
             <a:r>
-              <a:rPr lang="en-US" sz="1200" dirty="0">
+              <a:rPr lang="en-US" sz="1150" dirty="0">
                 <a:solidFill>
                   <a:srgbClr val="2D1B1A"/>
                 </a:solidFill>
@@ -7585,9 +7704,9 @@
                 <a:ea typeface="Calibri" pitchFamily="34" charset="-122"/>
                 <a:cs typeface="Calibri" pitchFamily="34" charset="-120"/>
               </a:rPr>
-              <a:t>Tx surcharge (compounds)</a:t>
-            </a:r>
-            <a:endParaRPr lang="en-US" sz="1200" dirty="0"/>
+              <a:t>Transport (B2B2C upside)</a:t>
+            </a:r>
+            <a:endParaRPr lang="en-US" sz="1150" dirty="0"/>
           </a:p>
         </p:txBody>
       </p:sp>
@@ -7599,7 +7718,7 @@
         </p:nvSpPr>
         <p:spPr>
           <a:xfrm>
-            <a:off x="7315200" y="3602736"/>
+            <a:off x="7315200" y="3419856"/>
             <a:ext cx="1234440" cy="320040"/>
           </a:xfrm>
           <a:prstGeom prst="rect">
@@ -7616,7 +7735,7 @@
               <a:buNone/>
             </a:pPr>
             <a:r>
-              <a:rPr lang="en-US" sz="1500" b="1" dirty="0">
+              <a:rPr lang="en-US" sz="1400" b="1" dirty="0">
                 <a:solidFill>
                   <a:srgbClr val="B85042"/>
                 </a:solidFill>
@@ -7624,9 +7743,9 @@
                 <a:ea typeface="Georgia" pitchFamily="34" charset="-122"/>
                 <a:cs typeface="Georgia" pitchFamily="34" charset="-120"/>
               </a:rPr>
-              <a:t>US$4,087</a:t>
-            </a:r>
-            <a:endParaRPr lang="en-US" sz="1500" dirty="0"/>
+              <a:t>US$31,677</a:t>
+            </a:r>
+            <a:endParaRPr lang="en-US" sz="1400" dirty="0"/>
           </a:p>
         </p:txBody>
       </p:sp>
@@ -7638,7 +7757,85 @@
         </p:nvSpPr>
         <p:spPr>
           <a:xfrm>
-            <a:off x="5120640" y="4206240"/>
+            <a:off x="5120640" y="3931920"/>
+            <a:ext cx="2377440" cy="320040"/>
+          </a:xfrm>
+          <a:prstGeom prst="rect">
+            <a:avLst/>
+          </a:prstGeom>
+          <a:noFill/>
+          <a:ln/>
+        </p:spPr>
+        <p:txBody>
+          <a:bodyPr wrap="square" lIns="0" tIns="0" rIns="0" bIns="0" rtlCol="0" anchor="ctr"/>
+          <a:lstStyle/>
+          <a:p>
+            <a:pPr indent="0" marL="0">
+              <a:buNone/>
+            </a:pPr>
+            <a:r>
+              <a:rPr lang="en-US" sz="1150" dirty="0">
+                <a:solidFill>
+                  <a:srgbClr val="2D1B1A"/>
+                </a:solidFill>
+                <a:latin typeface="Calibri" pitchFamily="34" charset="0"/>
+                <a:ea typeface="Calibri" pitchFamily="34" charset="-122"/>
+                <a:cs typeface="Calibri" pitchFamily="34" charset="-120"/>
+              </a:rPr>
+              <a:t>Onboarding (one-off)</a:t>
+            </a:r>
+            <a:endParaRPr lang="en-US" sz="1150" dirty="0"/>
+          </a:p>
+        </p:txBody>
+      </p:sp>
+      <p:sp>
+        <p:nvSpPr>
+          <p:cNvPr id="14" name="Text 11"/>
+          <p:cNvSpPr/>
+          <p:nvPr/>
+        </p:nvSpPr>
+        <p:spPr>
+          <a:xfrm>
+            <a:off x="7315200" y="3931920"/>
+            <a:ext cx="1234440" cy="320040"/>
+          </a:xfrm>
+          <a:prstGeom prst="rect">
+            <a:avLst/>
+          </a:prstGeom>
+          <a:noFill/>
+          <a:ln/>
+        </p:spPr>
+        <p:txBody>
+          <a:bodyPr wrap="square" lIns="0" tIns="0" rIns="0" bIns="0" rtlCol="0" anchor="ctr"/>
+          <a:lstStyle/>
+          <a:p>
+            <a:pPr algn="r" indent="0" marL="0">
+              <a:buNone/>
+            </a:pPr>
+            <a:r>
+              <a:rPr lang="en-US" sz="1400" b="1" dirty="0">
+                <a:solidFill>
+                  <a:srgbClr val="B85042"/>
+                </a:solidFill>
+                <a:latin typeface="Georgia" pitchFamily="34" charset="0"/>
+                <a:ea typeface="Georgia" pitchFamily="34" charset="-122"/>
+                <a:cs typeface="Georgia" pitchFamily="34" charset="-120"/>
+              </a:rPr>
+              <a:t>US$10,000</a:t>
+            </a:r>
+            <a:endParaRPr lang="en-US" sz="1400" dirty="0"/>
+          </a:p>
+        </p:txBody>
+      </p:sp>
+      <p:sp>
+        <p:nvSpPr>
+          <p:cNvPr id="15" name="Text 12"/>
+          <p:cNvSpPr/>
+          <p:nvPr/>
+        </p:nvSpPr>
+        <p:spPr>
+          <a:xfrm>
+            <a:off x="5120640" y="4297680"/>
             <a:ext cx="3429000" cy="548640"/>
           </a:xfrm>
           <a:prstGeom prst="rect">
@@ -7671,7 +7868,7 @@
       </p:sp>
       <p:sp>
         <p:nvSpPr>
-          <p:cNvPr id="14" name="Text 11"/>
+          <p:cNvPr id="16" name="Text 13"/>
           <p:cNvSpPr/>
           <p:nvPr/>
         </p:nvSpPr>
@@ -7710,7 +7907,7 @@
       </p:sp>
       <p:sp>
         <p:nvSpPr>
-          <p:cNvPr id="15" name="Text 12"/>
+          <p:cNvPr id="17" name="Text 14"/>
           <p:cNvSpPr/>
           <p:nvPr/>
         </p:nvSpPr>
@@ -7910,7 +8107,7 @@
                 <a:ea typeface="Calibri" pitchFamily="34" charset="-122"/>
                 <a:cs typeface="Calibri" pitchFamily="34" charset="-120"/>
               </a:rPr>
-              <a:t>Our surcharge revenue is small. The GMV we route onto Paynow — and the products it activates — is the number that matters to you, and it grows fastest.</a:t>
+              <a:t>Our take revenue is thin. The GMV we route onto Paynow — and the products it activates — is the number that matters to you, and it grows fastest.</a:t>
             </a:r>
             <a:endParaRPr lang="en-US" sz="1300" dirty="0"/>
           </a:p>
@@ -7925,7 +8122,7 @@
         <p:spPr>
           <a:xfrm>
             <a:off x="640080" y="2286000"/>
-            <a:ext cx="2606040" cy="1371600"/>
+            <a:ext cx="1486814" cy="1371600"/>
           </a:xfrm>
           <a:prstGeom prst="rect">
             <a:avLst/>
@@ -7971,24 +8168,24 @@
         </p:nvSpPr>
         <p:spPr>
           <a:xfrm>
-            <a:off x="822960" y="2395728"/>
-            <a:ext cx="2377440" cy="274320"/>
-          </a:xfrm>
-          <a:prstGeom prst="rect">
-            <a:avLst/>
-          </a:prstGeom>
-          <a:noFill/>
-          <a:ln/>
-        </p:spPr>
-        <p:txBody>
-          <a:bodyPr wrap="square" lIns="0" tIns="0" rIns="0" bIns="0" rtlCol="0" anchor="ctr"/>
-          <a:lstStyle/>
-          <a:p>
-            <a:pPr indent="0" marL="0">
-              <a:buNone/>
-            </a:pPr>
-            <a:r>
-              <a:rPr lang="en-US" sz="1000" b="1" spc="200" kern="0" dirty="0">
+            <a:off x="768096" y="2395728"/>
+            <a:ext cx="1322222" cy="274320"/>
+          </a:xfrm>
+          <a:prstGeom prst="rect">
+            <a:avLst/>
+          </a:prstGeom>
+          <a:noFill/>
+          <a:ln/>
+        </p:spPr>
+        <p:txBody>
+          <a:bodyPr wrap="square" lIns="0" tIns="0" rIns="0" bIns="0" rtlCol="0" anchor="ctr"/>
+          <a:lstStyle/>
+          <a:p>
+            <a:pPr indent="0" marL="0">
+              <a:buNone/>
+            </a:pPr>
+            <a:r>
+              <a:rPr lang="en-US" sz="1000" b="1" spc="100" kern="0" dirty="0">
                 <a:solidFill>
                   <a:srgbClr val="7A4F47"/>
                 </a:solidFill>
@@ -7996,7 +8193,7 @@
                 <a:ea typeface="Calibri" pitchFamily="34" charset="-122"/>
                 <a:cs typeface="Calibri" pitchFamily="34" charset="-120"/>
               </a:rPr>
-              <a:t>YEAR 1</a:t>
+              <a:t>Y1</a:t>
             </a:r>
             <a:endParaRPr lang="en-US" sz="1000" dirty="0"/>
           </a:p>
@@ -8010,24 +8207,24 @@
         </p:nvSpPr>
         <p:spPr>
           <a:xfrm>
-            <a:off x="822960" y="2697480"/>
-            <a:ext cx="2377440" cy="548640"/>
-          </a:xfrm>
-          <a:prstGeom prst="rect">
-            <a:avLst/>
-          </a:prstGeom>
-          <a:noFill/>
-          <a:ln/>
-        </p:spPr>
-        <p:txBody>
-          <a:bodyPr wrap="square" lIns="0" tIns="0" rIns="0" bIns="0" rtlCol="0" anchor="ctr"/>
-          <a:lstStyle/>
-          <a:p>
-            <a:pPr indent="0" marL="0">
-              <a:buNone/>
-            </a:pPr>
-            <a:r>
-              <a:rPr lang="en-US" sz="2800" b="1" dirty="0">
+            <a:off x="768096" y="2724912"/>
+            <a:ext cx="1322222" cy="502920"/>
+          </a:xfrm>
+          <a:prstGeom prst="rect">
+            <a:avLst/>
+          </a:prstGeom>
+          <a:noFill/>
+          <a:ln/>
+        </p:spPr>
+        <p:txBody>
+          <a:bodyPr wrap="square" lIns="0" tIns="0" rIns="0" bIns="0" rtlCol="0" anchor="ctr"/>
+          <a:lstStyle/>
+          <a:p>
+            <a:pPr indent="0" marL="0">
+              <a:buNone/>
+            </a:pPr>
+            <a:r>
+              <a:rPr lang="en-US" sz="2000" b="1" dirty="0">
                 <a:solidFill>
                   <a:srgbClr val="B85042"/>
                 </a:solidFill>
@@ -8035,9 +8232,9 @@
                 <a:ea typeface="Georgia" pitchFamily="34" charset="-122"/>
                 <a:cs typeface="Georgia" pitchFamily="34" charset="-120"/>
               </a:rPr>
-              <a:t>US$43,200</a:t>
-            </a:r>
-            <a:endParaRPr lang="en-US" sz="2800" dirty="0"/>
+              <a:t>US$895k</a:t>
+            </a:r>
+            <a:endParaRPr lang="en-US" sz="2000" dirty="0"/>
           </a:p>
         </p:txBody>
       </p:sp>
@@ -8049,24 +8246,24 @@
         </p:nvSpPr>
         <p:spPr>
           <a:xfrm>
-            <a:off x="822960" y="3246120"/>
-            <a:ext cx="2377440" cy="274320"/>
-          </a:xfrm>
-          <a:prstGeom prst="rect">
-            <a:avLst/>
-          </a:prstGeom>
-          <a:noFill/>
-          <a:ln/>
-        </p:spPr>
-        <p:txBody>
-          <a:bodyPr wrap="square" lIns="0" tIns="0" rIns="0" bIns="0" rtlCol="0" anchor="ctr"/>
-          <a:lstStyle/>
-          <a:p>
-            <a:pPr indent="0" marL="0">
-              <a:buNone/>
-            </a:pPr>
-            <a:r>
-              <a:rPr lang="en-US" sz="1000" i="1" dirty="0">
+            <a:off x="768096" y="3246120"/>
+            <a:ext cx="1322222" cy="274320"/>
+          </a:xfrm>
+          <a:prstGeom prst="rect">
+            <a:avLst/>
+          </a:prstGeom>
+          <a:noFill/>
+          <a:ln/>
+        </p:spPr>
+        <p:txBody>
+          <a:bodyPr wrap="square" lIns="0" tIns="0" rIns="0" bIns="0" rtlCol="0" anchor="ctr"/>
+          <a:lstStyle/>
+          <a:p>
+            <a:pPr indent="0" marL="0">
+              <a:buNone/>
+            </a:pPr>
+            <a:r>
+              <a:rPr lang="en-US" sz="900" i="1" dirty="0">
                 <a:solidFill>
                   <a:srgbClr val="7A4F47"/>
                 </a:solidFill>
@@ -8074,9 +8271,9 @@
                 <a:ea typeface="Calibri" pitchFamily="34" charset="-122"/>
                 <a:cs typeface="Calibri" pitchFamily="34" charset="-120"/>
               </a:rPr>
-              <a:t>settled through Paynow</a:t>
-            </a:r>
-            <a:endParaRPr lang="en-US" sz="1000" dirty="0"/>
+              <a:t>on Paynow</a:t>
+            </a:r>
+            <a:endParaRPr lang="en-US" sz="900" dirty="0"/>
           </a:p>
         </p:txBody>
       </p:sp>
@@ -8088,8 +8285,8 @@
         </p:nvSpPr>
         <p:spPr>
           <a:xfrm>
-            <a:off x="3383280" y="2286000"/>
-            <a:ext cx="2606040" cy="1371600"/>
+            <a:off x="2245766" y="2286000"/>
+            <a:ext cx="1486814" cy="1371600"/>
           </a:xfrm>
           <a:prstGeom prst="rect">
             <a:avLst/>
@@ -8115,7 +8312,7 @@
         </p:nvSpPr>
         <p:spPr>
           <a:xfrm>
-            <a:off x="3383280" y="2286000"/>
+            <a:off x="2245766" y="2286000"/>
             <a:ext cx="54864" cy="1371600"/>
           </a:xfrm>
           <a:prstGeom prst="rect">
@@ -8135,24 +8332,24 @@
         </p:nvSpPr>
         <p:spPr>
           <a:xfrm>
-            <a:off x="3566160" y="2395728"/>
-            <a:ext cx="2377440" cy="274320"/>
-          </a:xfrm>
-          <a:prstGeom prst="rect">
-            <a:avLst/>
-          </a:prstGeom>
-          <a:noFill/>
-          <a:ln/>
-        </p:spPr>
-        <p:txBody>
-          <a:bodyPr wrap="square" lIns="0" tIns="0" rIns="0" bIns="0" rtlCol="0" anchor="ctr"/>
-          <a:lstStyle/>
-          <a:p>
-            <a:pPr indent="0" marL="0">
-              <a:buNone/>
-            </a:pPr>
-            <a:r>
-              <a:rPr lang="en-US" sz="1000" b="1" spc="200" kern="0" dirty="0">
+            <a:off x="2373782" y="2395728"/>
+            <a:ext cx="1322222" cy="274320"/>
+          </a:xfrm>
+          <a:prstGeom prst="rect">
+            <a:avLst/>
+          </a:prstGeom>
+          <a:noFill/>
+          <a:ln/>
+        </p:spPr>
+        <p:txBody>
+          <a:bodyPr wrap="square" lIns="0" tIns="0" rIns="0" bIns="0" rtlCol="0" anchor="ctr"/>
+          <a:lstStyle/>
+          <a:p>
+            <a:pPr indent="0" marL="0">
+              <a:buNone/>
+            </a:pPr>
+            <a:r>
+              <a:rPr lang="en-US" sz="1000" b="1" spc="100" kern="0" dirty="0">
                 <a:solidFill>
                   <a:srgbClr val="7A4F47"/>
                 </a:solidFill>
@@ -8160,7 +8357,7 @@
                 <a:ea typeface="Calibri" pitchFamily="34" charset="-122"/>
                 <a:cs typeface="Calibri" pitchFamily="34" charset="-120"/>
               </a:rPr>
-              <a:t>YEAR 2</a:t>
+              <a:t>Y2</a:t>
             </a:r>
             <a:endParaRPr lang="en-US" sz="1000" dirty="0"/>
           </a:p>
@@ -8174,24 +8371,24 @@
         </p:nvSpPr>
         <p:spPr>
           <a:xfrm>
-            <a:off x="3566160" y="2697480"/>
-            <a:ext cx="2377440" cy="548640"/>
-          </a:xfrm>
-          <a:prstGeom prst="rect">
-            <a:avLst/>
-          </a:prstGeom>
-          <a:noFill/>
-          <a:ln/>
-        </p:spPr>
-        <p:txBody>
-          <a:bodyPr wrap="square" lIns="0" tIns="0" rIns="0" bIns="0" rtlCol="0" anchor="ctr"/>
-          <a:lstStyle/>
-          <a:p>
-            <a:pPr indent="0" marL="0">
-              <a:buNone/>
-            </a:pPr>
-            <a:r>
-              <a:rPr lang="en-US" sz="2800" b="1" dirty="0">
+            <a:off x="2373782" y="2724912"/>
+            <a:ext cx="1322222" cy="502920"/>
+          </a:xfrm>
+          <a:prstGeom prst="rect">
+            <a:avLst/>
+          </a:prstGeom>
+          <a:noFill/>
+          <a:ln/>
+        </p:spPr>
+        <p:txBody>
+          <a:bodyPr wrap="square" lIns="0" tIns="0" rIns="0" bIns="0" rtlCol="0" anchor="ctr"/>
+          <a:lstStyle/>
+          <a:p>
+            <a:pPr indent="0" marL="0">
+              <a:buNone/>
+            </a:pPr>
+            <a:r>
+              <a:rPr lang="en-US" sz="2000" b="1" dirty="0">
                 <a:solidFill>
                   <a:srgbClr val="B85042"/>
                 </a:solidFill>
@@ -8199,9 +8396,9 @@
                 <a:ea typeface="Georgia" pitchFamily="34" charset="-122"/>
                 <a:cs typeface="Georgia" pitchFamily="34" charset="-120"/>
               </a:rPr>
-              <a:t>US$223,200</a:t>
-            </a:r>
-            <a:endParaRPr lang="en-US" sz="2800" dirty="0"/>
+              <a:t>US$2,463k</a:t>
+            </a:r>
+            <a:endParaRPr lang="en-US" sz="2000" dirty="0"/>
           </a:p>
         </p:txBody>
       </p:sp>
@@ -8213,24 +8410,24 @@
         </p:nvSpPr>
         <p:spPr>
           <a:xfrm>
-            <a:off x="3566160" y="3246120"/>
-            <a:ext cx="2377440" cy="274320"/>
-          </a:xfrm>
-          <a:prstGeom prst="rect">
-            <a:avLst/>
-          </a:prstGeom>
-          <a:noFill/>
-          <a:ln/>
-        </p:spPr>
-        <p:txBody>
-          <a:bodyPr wrap="square" lIns="0" tIns="0" rIns="0" bIns="0" rtlCol="0" anchor="ctr"/>
-          <a:lstStyle/>
-          <a:p>
-            <a:pPr indent="0" marL="0">
-              <a:buNone/>
-            </a:pPr>
-            <a:r>
-              <a:rPr lang="en-US" sz="1000" i="1" dirty="0">
+            <a:off x="2373782" y="3246120"/>
+            <a:ext cx="1322222" cy="274320"/>
+          </a:xfrm>
+          <a:prstGeom prst="rect">
+            <a:avLst/>
+          </a:prstGeom>
+          <a:noFill/>
+          <a:ln/>
+        </p:spPr>
+        <p:txBody>
+          <a:bodyPr wrap="square" lIns="0" tIns="0" rIns="0" bIns="0" rtlCol="0" anchor="ctr"/>
+          <a:lstStyle/>
+          <a:p>
+            <a:pPr indent="0" marL="0">
+              <a:buNone/>
+            </a:pPr>
+            <a:r>
+              <a:rPr lang="en-US" sz="900" i="1" dirty="0">
                 <a:solidFill>
                   <a:srgbClr val="7A4F47"/>
                 </a:solidFill>
@@ -8238,9 +8435,9 @@
                 <a:ea typeface="Calibri" pitchFamily="34" charset="-122"/>
                 <a:cs typeface="Calibri" pitchFamily="34" charset="-120"/>
               </a:rPr>
-              <a:t>settled through Paynow</a:t>
-            </a:r>
-            <a:endParaRPr lang="en-US" sz="1000" dirty="0"/>
+              <a:t>on Paynow</a:t>
+            </a:r>
+            <a:endParaRPr lang="en-US" sz="900" dirty="0"/>
           </a:p>
         </p:txBody>
       </p:sp>
@@ -8252,8 +8449,8 @@
         </p:nvSpPr>
         <p:spPr>
           <a:xfrm>
-            <a:off x="6126480" y="2286000"/>
-            <a:ext cx="2606040" cy="1371600"/>
+            <a:off x="3851453" y="2286000"/>
+            <a:ext cx="1486814" cy="1371600"/>
           </a:xfrm>
           <a:prstGeom prst="rect">
             <a:avLst/>
@@ -8279,7 +8476,7 @@
         </p:nvSpPr>
         <p:spPr>
           <a:xfrm>
-            <a:off x="6126480" y="2286000"/>
+            <a:off x="3851453" y="2286000"/>
             <a:ext cx="54864" cy="1371600"/>
           </a:xfrm>
           <a:prstGeom prst="rect">
@@ -8299,24 +8496,24 @@
         </p:nvSpPr>
         <p:spPr>
           <a:xfrm>
-            <a:off x="6309360" y="2395728"/>
-            <a:ext cx="2377440" cy="274320"/>
-          </a:xfrm>
-          <a:prstGeom prst="rect">
-            <a:avLst/>
-          </a:prstGeom>
-          <a:noFill/>
-          <a:ln/>
-        </p:spPr>
-        <p:txBody>
-          <a:bodyPr wrap="square" lIns="0" tIns="0" rIns="0" bIns="0" rtlCol="0" anchor="ctr"/>
-          <a:lstStyle/>
-          <a:p>
-            <a:pPr indent="0" marL="0">
-              <a:buNone/>
-            </a:pPr>
-            <a:r>
-              <a:rPr lang="en-US" sz="1000" b="1" spc="200" kern="0" dirty="0">
+            <a:off x="3979469" y="2395728"/>
+            <a:ext cx="1322222" cy="274320"/>
+          </a:xfrm>
+          <a:prstGeom prst="rect">
+            <a:avLst/>
+          </a:prstGeom>
+          <a:noFill/>
+          <a:ln/>
+        </p:spPr>
+        <p:txBody>
+          <a:bodyPr wrap="square" lIns="0" tIns="0" rIns="0" bIns="0" rtlCol="0" anchor="ctr"/>
+          <a:lstStyle/>
+          <a:p>
+            <a:pPr indent="0" marL="0">
+              <a:buNone/>
+            </a:pPr>
+            <a:r>
+              <a:rPr lang="en-US" sz="1000" b="1" spc="100" kern="0" dirty="0">
                 <a:solidFill>
                   <a:srgbClr val="7A4F47"/>
                 </a:solidFill>
@@ -8324,7 +8521,7 @@
                 <a:ea typeface="Calibri" pitchFamily="34" charset="-122"/>
                 <a:cs typeface="Calibri" pitchFamily="34" charset="-120"/>
               </a:rPr>
-              <a:t>YEAR 3</a:t>
+              <a:t>Y3</a:t>
             </a:r>
             <a:endParaRPr lang="en-US" sz="1000" dirty="0"/>
           </a:p>
@@ -8338,24 +8535,24 @@
         </p:nvSpPr>
         <p:spPr>
           <a:xfrm>
-            <a:off x="6309360" y="2697480"/>
-            <a:ext cx="2377440" cy="548640"/>
-          </a:xfrm>
-          <a:prstGeom prst="rect">
-            <a:avLst/>
-          </a:prstGeom>
-          <a:noFill/>
-          <a:ln/>
-        </p:spPr>
-        <p:txBody>
-          <a:bodyPr wrap="square" lIns="0" tIns="0" rIns="0" bIns="0" rtlCol="0" anchor="ctr"/>
-          <a:lstStyle/>
-          <a:p>
-            <a:pPr indent="0" marL="0">
-              <a:buNone/>
-            </a:pPr>
-            <a:r>
-              <a:rPr lang="en-US" sz="2800" b="1" dirty="0">
+            <a:off x="3979469" y="2724912"/>
+            <a:ext cx="1322222" cy="502920"/>
+          </a:xfrm>
+          <a:prstGeom prst="rect">
+            <a:avLst/>
+          </a:prstGeom>
+          <a:noFill/>
+          <a:ln/>
+        </p:spPr>
+        <p:txBody>
+          <a:bodyPr wrap="square" lIns="0" tIns="0" rIns="0" bIns="0" rtlCol="0" anchor="ctr"/>
+          <a:lstStyle/>
+          <a:p>
+            <a:pPr indent="0" marL="0">
+              <a:buNone/>
+            </a:pPr>
+            <a:r>
+              <a:rPr lang="en-US" sz="2000" b="1" dirty="0">
                 <a:solidFill>
                   <a:srgbClr val="B85042"/>
                 </a:solidFill>
@@ -8363,9 +8560,9 @@
                 <a:ea typeface="Georgia" pitchFamily="34" charset="-122"/>
                 <a:cs typeface="Georgia" pitchFamily="34" charset="-120"/>
               </a:rPr>
-              <a:t>US$545,400</a:t>
-            </a:r>
-            <a:endParaRPr lang="en-US" sz="2800" dirty="0"/>
+              <a:t>US$3,683k</a:t>
+            </a:r>
+            <a:endParaRPr lang="en-US" sz="2000" dirty="0"/>
           </a:p>
         </p:txBody>
       </p:sp>
@@ -8377,24 +8574,24 @@
         </p:nvSpPr>
         <p:spPr>
           <a:xfrm>
-            <a:off x="6309360" y="3246120"/>
-            <a:ext cx="2377440" cy="274320"/>
-          </a:xfrm>
-          <a:prstGeom prst="rect">
-            <a:avLst/>
-          </a:prstGeom>
-          <a:noFill/>
-          <a:ln/>
-        </p:spPr>
-        <p:txBody>
-          <a:bodyPr wrap="square" lIns="0" tIns="0" rIns="0" bIns="0" rtlCol="0" anchor="ctr"/>
-          <a:lstStyle/>
-          <a:p>
-            <a:pPr indent="0" marL="0">
-              <a:buNone/>
-            </a:pPr>
-            <a:r>
-              <a:rPr lang="en-US" sz="1000" i="1" dirty="0">
+            <a:off x="3979469" y="3246120"/>
+            <a:ext cx="1322222" cy="274320"/>
+          </a:xfrm>
+          <a:prstGeom prst="rect">
+            <a:avLst/>
+          </a:prstGeom>
+          <a:noFill/>
+          <a:ln/>
+        </p:spPr>
+        <p:txBody>
+          <a:bodyPr wrap="square" lIns="0" tIns="0" rIns="0" bIns="0" rtlCol="0" anchor="ctr"/>
+          <a:lstStyle/>
+          <a:p>
+            <a:pPr indent="0" marL="0">
+              <a:buNone/>
+            </a:pPr>
+            <a:r>
+              <a:rPr lang="en-US" sz="900" i="1" dirty="0">
                 <a:solidFill>
                   <a:srgbClr val="7A4F47"/>
                 </a:solidFill>
@@ -8402,7 +8599,93 @@
                 <a:ea typeface="Calibri" pitchFamily="34" charset="-122"/>
                 <a:cs typeface="Calibri" pitchFamily="34" charset="-120"/>
               </a:rPr>
-              <a:t>settled through Paynow</a:t>
+              <a:t>on Paynow</a:t>
+            </a:r>
+            <a:endParaRPr lang="en-US" sz="900" dirty="0"/>
+          </a:p>
+        </p:txBody>
+      </p:sp>
+      <p:sp>
+        <p:nvSpPr>
+          <p:cNvPr id="21" name="Shape 19"/>
+          <p:cNvSpPr/>
+          <p:nvPr/>
+        </p:nvSpPr>
+        <p:spPr>
+          <a:xfrm>
+            <a:off x="5457139" y="2286000"/>
+            <a:ext cx="1486814" cy="1371600"/>
+          </a:xfrm>
+          <a:prstGeom prst="rect">
+            <a:avLst/>
+          </a:prstGeom>
+          <a:solidFill>
+            <a:srgbClr val="FFFFFF"/>
+          </a:solidFill>
+          <a:ln/>
+          <a:effectLst>
+            <a:outerShdw sx="100000" sy="100000" kx="0" ky="0" algn="bl" rotWithShape="0" blurRad="101600" dist="25400" dir="5400000">
+              <a:srgbClr val="000000">
+                <a:alpha val="8000"/>
+              </a:srgbClr>
+            </a:outerShdw>
+          </a:effectLst>
+        </p:spPr>
+      </p:sp>
+      <p:sp>
+        <p:nvSpPr>
+          <p:cNvPr id="22" name="Shape 20"/>
+          <p:cNvSpPr/>
+          <p:nvPr/>
+        </p:nvSpPr>
+        <p:spPr>
+          <a:xfrm>
+            <a:off x="5457139" y="2286000"/>
+            <a:ext cx="54864" cy="1371600"/>
+          </a:xfrm>
+          <a:prstGeom prst="rect">
+            <a:avLst/>
+          </a:prstGeom>
+          <a:solidFill>
+            <a:srgbClr val="D4A843"/>
+          </a:solidFill>
+          <a:ln/>
+        </p:spPr>
+      </p:sp>
+      <p:sp>
+        <p:nvSpPr>
+          <p:cNvPr id="23" name="Text 21"/>
+          <p:cNvSpPr/>
+          <p:nvPr/>
+        </p:nvSpPr>
+        <p:spPr>
+          <a:xfrm>
+            <a:off x="5585155" y="2395728"/>
+            <a:ext cx="1322222" cy="274320"/>
+          </a:xfrm>
+          <a:prstGeom prst="rect">
+            <a:avLst/>
+          </a:prstGeom>
+          <a:noFill/>
+          <a:ln/>
+        </p:spPr>
+        <p:txBody>
+          <a:bodyPr wrap="square" lIns="0" tIns="0" rIns="0" bIns="0" rtlCol="0" anchor="ctr"/>
+          <a:lstStyle/>
+          <a:p>
+            <a:pPr indent="0" marL="0">
+              <a:buNone/>
+            </a:pPr>
+            <a:r>
+              <a:rPr lang="en-US" sz="1000" b="1" spc="100" kern="0" dirty="0">
+                <a:solidFill>
+                  <a:srgbClr val="7A4F47"/>
+                </a:solidFill>
+                <a:latin typeface="Calibri" pitchFamily="34" charset="0"/>
+                <a:ea typeface="Calibri" pitchFamily="34" charset="-122"/>
+                <a:cs typeface="Calibri" pitchFamily="34" charset="-120"/>
+              </a:rPr>
+              <a:t>Y4</a:t>
             </a:r>
             <a:endParaRPr lang="en-US" sz="1000" dirty="0"/>
           </a:p>
@@ -8410,13 +8693,308 @@
       </p:sp>
       <p:sp>
         <p:nvSpPr>
-          <p:cNvPr id="21" name="Text 19"/>
-          <p:cNvSpPr/>
-          <p:nvPr/>
-        </p:nvSpPr>
-        <p:spPr>
-          <a:xfrm>
-            <a:off x="640080" y="3840480"/>
+          <p:cNvPr id="24" name="Text 22"/>
+          <p:cNvSpPr/>
+          <p:nvPr/>
+        </p:nvSpPr>
+        <p:spPr>
+          <a:xfrm>
+            <a:off x="5585155" y="2724912"/>
+            <a:ext cx="1322222" cy="502920"/>
+          </a:xfrm>
+          <a:prstGeom prst="rect">
+            <a:avLst/>
+          </a:prstGeom>
+          <a:noFill/>
+          <a:ln/>
+        </p:spPr>
+        <p:txBody>
+          <a:bodyPr wrap="square" lIns="0" tIns="0" rIns="0" bIns="0" rtlCol="0" anchor="ctr"/>
+          <a:lstStyle/>
+          <a:p>
+            <a:pPr indent="0" marL="0">
+              <a:buNone/>
+            </a:pPr>
+            <a:r>
+              <a:rPr lang="en-US" sz="2000" b="1" dirty="0">
+                <a:solidFill>
+                  <a:srgbClr val="B85042"/>
+                </a:solidFill>
+                <a:latin typeface="Georgia" pitchFamily="34" charset="0"/>
+                <a:ea typeface="Georgia" pitchFamily="34" charset="-122"/>
+                <a:cs typeface="Georgia" pitchFamily="34" charset="-120"/>
+              </a:rPr>
+              <a:t>US$5,311k</a:t>
+            </a:r>
+            <a:endParaRPr lang="en-US" sz="2000" dirty="0"/>
+          </a:p>
+        </p:txBody>
+      </p:sp>
+      <p:sp>
+        <p:nvSpPr>
+          <p:cNvPr id="25" name="Text 23"/>
+          <p:cNvSpPr/>
+          <p:nvPr/>
+        </p:nvSpPr>
+        <p:spPr>
+          <a:xfrm>
+            <a:off x="5585155" y="3246120"/>
+            <a:ext cx="1322222" cy="274320"/>
+          </a:xfrm>
+          <a:prstGeom prst="rect">
+            <a:avLst/>
+          </a:prstGeom>
+          <a:noFill/>
+          <a:ln/>
+        </p:spPr>
+        <p:txBody>
+          <a:bodyPr wrap="square" lIns="0" tIns="0" rIns="0" bIns="0" rtlCol="0" anchor="ctr"/>
+          <a:lstStyle/>
+          <a:p>
+            <a:pPr indent="0" marL="0">
+              <a:buNone/>
+            </a:pPr>
+            <a:r>
+              <a:rPr lang="en-US" sz="900" i="1" dirty="0">
+                <a:solidFill>
+                  <a:srgbClr val="7A4F47"/>
+                </a:solidFill>
+                <a:latin typeface="Calibri" pitchFamily="34" charset="0"/>
+                <a:ea typeface="Calibri" pitchFamily="34" charset="-122"/>
+                <a:cs typeface="Calibri" pitchFamily="34" charset="-120"/>
+              </a:rPr>
+              <a:t>on Paynow</a:t>
+            </a:r>
+            <a:endParaRPr lang="en-US" sz="900" dirty="0"/>
+          </a:p>
+        </p:txBody>
+      </p:sp>
+      <p:sp>
+        <p:nvSpPr>
+          <p:cNvPr id="26" name="Shape 24"/>
+          <p:cNvSpPr/>
+          <p:nvPr/>
+        </p:nvSpPr>
+        <p:spPr>
+          <a:xfrm>
+            <a:off x="7062826" y="2286000"/>
+            <a:ext cx="1486814" cy="1371600"/>
+          </a:xfrm>
+          <a:prstGeom prst="rect">
+            <a:avLst/>
+          </a:prstGeom>
+          <a:solidFill>
+            <a:srgbClr val="FFFFFF"/>
+          </a:solidFill>
+          <a:ln/>
+          <a:effectLst>
+            <a:outerShdw sx="100000" sy="100000" kx="0" ky="0" algn="bl" rotWithShape="0" blurRad="101600" dist="25400" dir="5400000">
+              <a:srgbClr val="000000">
+                <a:alpha val="8000"/>
+              </a:srgbClr>
+            </a:outerShdw>
+          </a:effectLst>
+        </p:spPr>
+      </p:sp>
+      <p:sp>
+        <p:nvSpPr>
+          <p:cNvPr id="27" name="Shape 25"/>
+          <p:cNvSpPr/>
+          <p:nvPr/>
+        </p:nvSpPr>
+        <p:spPr>
+          <a:xfrm>
+            <a:off x="7062826" y="2286000"/>
+            <a:ext cx="54864" cy="1371600"/>
+          </a:xfrm>
+          <a:prstGeom prst="rect">
+            <a:avLst/>
+          </a:prstGeom>
+          <a:solidFill>
+            <a:srgbClr val="D4A843"/>
+          </a:solidFill>
+          <a:ln/>
+        </p:spPr>
+      </p:sp>
+      <p:sp>
+        <p:nvSpPr>
+          <p:cNvPr id="28" name="Text 26"/>
+          <p:cNvSpPr/>
+          <p:nvPr/>
+        </p:nvSpPr>
+        <p:spPr>
+          <a:xfrm>
+            <a:off x="7190842" y="2395728"/>
+            <a:ext cx="1322222" cy="274320"/>
+          </a:xfrm>
+          <a:prstGeom prst="rect">
+            <a:avLst/>
+          </a:prstGeom>
+          <a:noFill/>
+          <a:ln/>
+        </p:spPr>
+        <p:txBody>
+          <a:bodyPr wrap="square" lIns="0" tIns="0" rIns="0" bIns="0" rtlCol="0" anchor="ctr"/>
+          <a:lstStyle/>
+          <a:p>
+            <a:pPr indent="0" marL="0">
+              <a:buNone/>
+            </a:pPr>
+            <a:r>
+              <a:rPr lang="en-US" sz="1000" b="1" spc="100" kern="0" dirty="0">
+                <a:solidFill>
+                  <a:srgbClr val="7A4F47"/>
+                </a:solidFill>
+                <a:latin typeface="Calibri" pitchFamily="34" charset="0"/>
+                <a:ea typeface="Calibri" pitchFamily="34" charset="-122"/>
+                <a:cs typeface="Calibri" pitchFamily="34" charset="-120"/>
+              </a:rPr>
+              <a:t>Y5</a:t>
+            </a:r>
+            <a:endParaRPr lang="en-US" sz="1000" dirty="0"/>
+          </a:p>
+        </p:txBody>
+      </p:sp>
+      <p:sp>
+        <p:nvSpPr>
+          <p:cNvPr id="29" name="Text 27"/>
+          <p:cNvSpPr/>
+          <p:nvPr/>
+        </p:nvSpPr>
+        <p:spPr>
+          <a:xfrm>
+            <a:off x="7190842" y="2724912"/>
+            <a:ext cx="1322222" cy="502920"/>
+          </a:xfrm>
+          <a:prstGeom prst="rect">
+            <a:avLst/>
+          </a:prstGeom>
+          <a:noFill/>
+          <a:ln/>
+        </p:spPr>
+        <p:txBody>
+          <a:bodyPr wrap="square" lIns="0" tIns="0" rIns="0" bIns="0" rtlCol="0" anchor="ctr"/>
+          <a:lstStyle/>
+          <a:p>
+            <a:pPr indent="0" marL="0">
+              <a:buNone/>
+            </a:pPr>
+            <a:r>
+              <a:rPr lang="en-US" sz="2000" b="1" dirty="0">
+                <a:solidFill>
+                  <a:srgbClr val="B85042"/>
+                </a:solidFill>
+                <a:latin typeface="Georgia" pitchFamily="34" charset="0"/>
+                <a:ea typeface="Georgia" pitchFamily="34" charset="-122"/>
+                <a:cs typeface="Georgia" pitchFamily="34" charset="-120"/>
+              </a:rPr>
+              <a:t>US$7,149k</a:t>
+            </a:r>
+            <a:endParaRPr lang="en-US" sz="2000" dirty="0"/>
+          </a:p>
+        </p:txBody>
+      </p:sp>
+      <p:sp>
+        <p:nvSpPr>
+          <p:cNvPr id="30" name="Text 28"/>
+          <p:cNvSpPr/>
+          <p:nvPr/>
+        </p:nvSpPr>
+        <p:spPr>
+          <a:xfrm>
+            <a:off x="7190842" y="3246120"/>
+            <a:ext cx="1322222" cy="274320"/>
+          </a:xfrm>
+          <a:prstGeom prst="rect">
+            <a:avLst/>
+          </a:prstGeom>
+          <a:noFill/>
+          <a:ln/>
+        </p:spPr>
+        <p:txBody>
+          <a:bodyPr wrap="square" lIns="0" tIns="0" rIns="0" bIns="0" rtlCol="0" anchor="ctr"/>
+          <a:lstStyle/>
+          <a:p>
+            <a:pPr indent="0" marL="0">
+              <a:buNone/>
+            </a:pPr>
+            <a:r>
+              <a:rPr lang="en-US" sz="900" i="1" dirty="0">
+                <a:solidFill>
+                  <a:srgbClr val="7A4F47"/>
+                </a:solidFill>
+                <a:latin typeface="Calibri" pitchFamily="34" charset="0"/>
+                <a:ea typeface="Calibri" pitchFamily="34" charset="-122"/>
+                <a:cs typeface="Calibri" pitchFamily="34" charset="-120"/>
+              </a:rPr>
+              <a:t>on Paynow</a:t>
+            </a:r>
+            <a:endParaRPr lang="en-US" sz="900" dirty="0"/>
+          </a:p>
+        </p:txBody>
+      </p:sp>
+      <p:sp>
+        <p:nvSpPr>
+          <p:cNvPr id="31" name="Text 29"/>
+          <p:cNvSpPr/>
+          <p:nvPr/>
+        </p:nvSpPr>
+        <p:spPr>
+          <a:xfrm>
+            <a:off x="640080" y="3767328"/>
+            <a:ext cx="7955280" cy="274320"/>
+          </a:xfrm>
+          <a:prstGeom prst="rect">
+            <a:avLst/>
+          </a:prstGeom>
+          <a:noFill/>
+          <a:ln/>
+        </p:spPr>
+        <p:txBody>
+          <a:bodyPr wrap="square" lIns="0" tIns="0" rIns="0" bIns="0" rtlCol="0" anchor="ctr"/>
+          <a:lstStyle/>
+          <a:p>
+            <a:pPr indent="0" marL="0">
+              <a:buNone/>
+            </a:pPr>
+            <a:r>
+              <a:rPr lang="en-US" sz="1150" b="1" i="1" dirty="0">
+                <a:solidFill>
+                  <a:srgbClr val="B85042"/>
+                </a:solidFill>
+                <a:latin typeface="Calibri" pitchFamily="34" charset="0"/>
+                <a:ea typeface="Calibri" pitchFamily="34" charset="-122"/>
+                <a:cs typeface="Calibri" pitchFamily="34" charset="-120"/>
+              </a:rPr>
+              <a:t>5-year GMV onto Paynow rails:  </a:t>
+            </a:r>
+            <a:pPr indent="0" marL="0">
+              <a:buNone/>
+            </a:pPr>
+            <a:r>
+              <a:rPr lang="en-US" sz="1150" i="1" dirty="0">
+                <a:solidFill>
+                  <a:srgbClr val="2D1B1A"/>
+                </a:solidFill>
+                <a:latin typeface="Calibri" pitchFamily="34" charset="0"/>
+                <a:ea typeface="Calibri" pitchFamily="34" charset="-122"/>
+                <a:cs typeface="Calibri" pitchFamily="34" charset="-120"/>
+              </a:rPr>
+              <a:t>US$19,501,000 (over US$19.5M).</a:t>
+            </a:r>
+            <a:endParaRPr lang="en-US" sz="1150" dirty="0"/>
+          </a:p>
+        </p:txBody>
+      </p:sp>
+      <p:sp>
+        <p:nvSpPr>
+          <p:cNvPr id="32" name="Text 30"/>
+          <p:cNvSpPr/>
+          <p:nvPr/>
+        </p:nvSpPr>
+        <p:spPr>
+          <a:xfrm>
+            <a:off x="640080" y="4114800"/>
             <a:ext cx="7863840" cy="274320"/>
           </a:xfrm>
           <a:prstGeom prst="rect">
@@ -8449,13 +9027,13 @@
       </p:sp>
       <p:sp>
         <p:nvSpPr>
-          <p:cNvPr id="22" name="Text 20"/>
-          <p:cNvSpPr/>
-          <p:nvPr/>
-        </p:nvSpPr>
-        <p:spPr>
-          <a:xfrm>
-            <a:off x="640080" y="4114800"/>
+          <p:cNvPr id="33" name="Text 31"/>
+          <p:cNvSpPr/>
+          <p:nvPr/>
+        </p:nvSpPr>
+        <p:spPr>
+          <a:xfrm>
+            <a:off x="640080" y="4389120"/>
             <a:ext cx="7955280" cy="457200"/>
           </a:xfrm>
           <a:prstGeom prst="rect">
@@ -8472,7 +9050,7 @@
               <a:buNone/>
             </a:pPr>
             <a:r>
-              <a:rPr lang="en-US" sz="1250" dirty="0">
+              <a:rPr lang="en-US" sz="1150" dirty="0">
                 <a:solidFill>
                   <a:srgbClr val="2D1B1A"/>
                 </a:solidFill>
@@ -8486,7 +9064,7 @@
               <a:buNone/>
             </a:pPr>
             <a:r>
-              <a:rPr lang="en-US" sz="1250" i="1" dirty="0">
+              <a:rPr lang="en-US" sz="1150" i="1" dirty="0">
                 <a:solidFill>
                   <a:srgbClr val="7A4F47"/>
                 </a:solidFill>
@@ -8496,13 +9074,13 @@
               </a:rPr>
               <a:t>Paab cash (once unblocked)</a:t>
             </a:r>
-            <a:endParaRPr lang="en-US" sz="1250" dirty="0"/>
-          </a:p>
-        </p:txBody>
-      </p:sp>
-      <p:sp>
-        <p:nvSpPr>
-          <p:cNvPr id="23" name="Text 21"/>
+            <a:endParaRPr lang="en-US" sz="1150" dirty="0"/>
+          </a:p>
+        </p:txBody>
+      </p:sp>
+      <p:sp>
+        <p:nvSpPr>
+          <p:cNvPr id="34" name="Text 32"/>
           <p:cNvSpPr/>
           <p:nvPr/>
         </p:nvSpPr>
@@ -8541,7 +9119,7 @@
       </p:sp>
       <p:sp>
         <p:nvSpPr>
-          <p:cNvPr id="24" name="Text 22"/>
+          <p:cNvPr id="35" name="Text 33"/>
           <p:cNvSpPr/>
           <p:nvPr/>
         </p:nvSpPr>
@@ -8702,7 +9280,7 @@
                 <a:ea typeface="Georgia" pitchFamily="34" charset="-122"/>
                 <a:cs typeface="Georgia" pitchFamily="34" charset="-120"/>
               </a:rPr>
-              <a:t>Each house's surplus funds the next.</a:t>
+              <a:t>Operating surplus funds the next cohort of houses.</a:t>
             </a:r>
             <a:endParaRPr lang="en-US" sz="3100" dirty="0"/>
           </a:p>
@@ -8741,7 +9319,7 @@
                 <a:ea typeface="Calibri" pitchFamily="34" charset="-122"/>
                 <a:cs typeface="Calibri" pitchFamily="34" charset="-120"/>
               </a:rPr>
-              <a:t>There is no funding round because there is nowhere to raise one. Growth is paid for out of operating surplus — slow, self-funded, and durable.</a:t>
+              <a:t>There is no funding round because there is nowhere to raise one. Growth is paid for out of operating surplus, behind a 2–3 month working-capital buffer — self-funded and durable.</a:t>
             </a:r>
             <a:endParaRPr lang="en-US" sz="1300" dirty="0"/>
           </a:p>
@@ -8835,7 +9413,7 @@
                 <a:ea typeface="Calibri" pitchFamily="34" charset="-122"/>
                 <a:cs typeface="Calibri" pitchFamily="34" charset="-120"/>
               </a:rPr>
-              <a:t>Surplus from house #1 pays the part-time help that lets the founder take on house #2.</a:t>
+              <a:t>Surplus from the live book funds the next onboarding cohort and the team that runs it — no outside equity.</a:t>
             </a:r>
             <a:endParaRPr lang="en-US" sz="1000" dirty="0"/>
           </a:p>
@@ -8874,7 +9452,7 @@
                 <a:ea typeface="Georgia" pitchFamily="34" charset="-122"/>
                 <a:cs typeface="Georgia" pitchFamily="34" charset="-120"/>
               </a:rPr>
-              <a:t>Compounds slowly</a:t>
+              <a:t>Compounds with scale</a:t>
             </a:r>
             <a:endParaRPr lang="en-US" sz="1350" dirty="0"/>
           </a:p>
@@ -8913,7 +9491,7 @@
                 <a:ea typeface="Calibri" pitchFamily="34" charset="-122"/>
                 <a:cs typeface="Calibri" pitchFamily="34" charset="-120"/>
               </a:rPr>
-              <a:t>Income roughly quintuples Y1→Y3 (US$6k → US$18k → US$32k) — on no outside money.</a:t>
+              <a:t>Surplus grows roughly tenfold Y1→Y5 (US$13k → US$126k) as houses ramp 5 → 20 and transport attaches.</a:t>
             </a:r>
             <a:endParaRPr lang="en-US" sz="1000" dirty="0"/>
           </a:p>
@@ -8952,7 +9530,7 @@
                 <a:ea typeface="Georgia" pitchFamily="34" charset="-122"/>
                 <a:cs typeface="Georgia" pitchFamily="34" charset="-120"/>
               </a:rPr>
-              <a:t>Ceiling is people, not cash</a:t>
+              <a:t>Buffer, not runway</a:t>
             </a:r>
             <a:endParaRPr lang="en-US" sz="1350" dirty="0"/>
           </a:p>
@@ -8991,7 +9569,7 @@
                 <a:ea typeface="Calibri" pitchFamily="34" charset="-122"/>
                 <a:cs typeface="Calibri" pitchFamily="34" charset="-120"/>
               </a:rPr>
-              <a:t>Growth caps at how many houses an owner + helpers can run well — then you hire from surplus, never from a raise.</a:t>
+              <a:t>A prudent 2–3 month opex working-capital buffer absorbs a bad quarter — Y1's cushion is thin, so the buffer matters.</a:t>
             </a:r>
             <a:endParaRPr lang="en-US" sz="1000" dirty="0"/>
           </a:p>
@@ -9030,7 +9608,7 @@
                 <a:ea typeface="Calibri" pitchFamily="34" charset="-122"/>
                 <a:cs typeface="Calibri" pitchFamily="34" charset="-120"/>
               </a:rPr>
-              <a:t>Conservative by necessity: a Zimbabwean startup that cannot raise must be cash-positive — so we built one that is.</a:t>
+              <a:t>Conservative by necessity: a Zimbabwean platform that cannot raise must be surplus-positive early — so we built one that is.</a:t>
             </a:r>
             <a:endParaRPr lang="en-US" sz="1050" dirty="0"/>
           </a:p>
@@ -9433,7 +10011,7 @@
               <a:buNone/>
             </a:pPr>
             <a:r>
-              <a:rPr lang="en-US" sz="1000" dirty="0">
+              <a:rPr lang="en-US" sz="950" dirty="0">
                 <a:solidFill>
                   <a:srgbClr val="7A4F47"/>
                 </a:solidFill>
@@ -9441,9 +10019,9 @@
                 <a:ea typeface="Calibri" pitchFamily="34" charset="-122"/>
                 <a:cs typeface="Calibri" pitchFamily="34" charset="-120"/>
               </a:rPr>
-              <a:t>Buyers and houses transact in cash; USD is tight. Mitigation: meet them on every rail (USSD, BillPay, Paab) so digital is easier than cash.</a:t>
-            </a:r>
-            <a:endParaRPr lang="en-US" sz="1000" dirty="0"/>
+              <a:t>Buyers and houses transact in cash; USD is tight. Mitigation: meet them on five rails (web/PWA, WhatsApp, USSD, BillPay, Messenger) so digital is easier than cash.</a:t>
+            </a:r>
+            <a:endParaRPr lang="en-US" sz="950" dirty="0"/>
           </a:p>
         </p:txBody>
       </p:sp>
@@ -9597,7 +10175,7 @@
               <a:buNone/>
             </a:pPr>
             <a:r>
-              <a:rPr lang="en-US" sz="1000" dirty="0">
+              <a:rPr lang="en-US" sz="950" dirty="0">
                 <a:solidFill>
                   <a:srgbClr val="7A4F47"/>
                 </a:solidFill>
@@ -9605,9 +10183,9 @@
                 <a:ea typeface="Calibri" pitchFamily="34" charset="-122"/>
                 <a:cs typeface="Calibri" pitchFamily="34" charset="-120"/>
               </a:rPr>
-              <a:t>ZWL/ZiG swings wipe out local-currency margins. Mitigation: all pricing in USD; surcharge invoiced on USD-equivalent settled.</a:t>
-            </a:r>
-            <a:endParaRPr lang="en-US" sz="1000" dirty="0"/>
+              <a:t>ZWL/ZiG swings wipe out local-currency margins. Mitigation: all pricing in USD; the take invoiced on USD-equivalent settled GMV.</a:t>
+            </a:r>
+            <a:endParaRPr lang="en-US" sz="950" dirty="0"/>
           </a:p>
         </p:txBody>
       </p:sp>
@@ -9730,7 +10308,7 @@
                 <a:ea typeface="Georgia" pitchFamily="34" charset="-122"/>
                 <a:cs typeface="Georgia" pitchFamily="34" charset="-120"/>
               </a:rPr>
-              <a:t>No capital cushion</a:t>
+              <a:t>Thin Year-1 cushion</a:t>
             </a:r>
             <a:endParaRPr lang="en-US" sz="1450" dirty="0"/>
           </a:p>
@@ -9761,7 +10339,7 @@
               <a:buNone/>
             </a:pPr>
             <a:r>
-              <a:rPr lang="en-US" sz="1000" dirty="0">
+              <a:rPr lang="en-US" sz="950" dirty="0">
                 <a:solidFill>
                   <a:srgbClr val="7A4F47"/>
                 </a:solidFill>
@@ -9769,9 +10347,9 @@
                 <a:ea typeface="Calibri" pitchFamily="34" charset="-122"/>
                 <a:cs typeface="Calibri" pitchFamily="34" charset="-120"/>
               </a:rPr>
-              <a:t>No raise means no buffer for a bad quarter. Mitigation: stay cash-positive from house #1; never spend ahead of surplus.</a:t>
-            </a:r>
-            <a:endParaRPr lang="en-US" sz="1000" dirty="0"/>
+              <a:t>No raise means a slim buffer for a bad quarter. Mitigation: hold a 2–3 month opex working-capital buffer; never spend ahead of surplus.</a:t>
+            </a:r>
+            <a:endParaRPr lang="en-US" sz="950" dirty="0"/>
           </a:p>
         </p:txBody>
       </p:sp>
@@ -9894,7 +10472,7 @@
                 <a:ea typeface="Georgia" pitchFamily="34" charset="-122"/>
                 <a:cs typeface="Georgia" pitchFamily="34" charset="-120"/>
               </a:rPr>
-              <a:t>Operator-capacity ceiling</a:t>
+              <a:t>Anchor concentration</a:t>
             </a:r>
             <a:endParaRPr lang="en-US" sz="1450" dirty="0"/>
           </a:p>
@@ -9925,7 +10503,7 @@
               <a:buNone/>
             </a:pPr>
             <a:r>
-              <a:rPr lang="en-US" sz="1000" dirty="0">
+              <a:rPr lang="en-US" sz="950" dirty="0">
                 <a:solidFill>
                   <a:srgbClr val="7A4F47"/>
                 </a:solidFill>
@@ -9933,9 +10511,9 @@
                 <a:ea typeface="Calibri" pitchFamily="34" charset="-122"/>
                 <a:cs typeface="Calibri" pitchFamily="34" charset="-120"/>
               </a:rPr>
-              <a:t>One owner can only run so many houses. Mitigation: reinvest surplus into part-time help before signing the house that would overload us.</a:t>
-            </a:r>
-            <a:endParaRPr lang="en-US" sz="1000" dirty="0"/>
+              <a:t>The plan leans on landing 3 of ~8 Tier A anchors in Year 1. Mitigation: anchors-first GTM, paid pilots that credit toward onboarding, and the self-serve wizard to keep the funnel moving.</a:t>
+            </a:r>
+            <a:endParaRPr lang="en-US" sz="950" dirty="0"/>
           </a:p>
         </p:txBody>
       </p:sp>
